--- a/slides/A03-do-caminho-de-ataque-ao-modelo-de-ameacas/fonte/A03-do-caminho-de-ataque-ao-modelo-de-ameacas.pptx
+++ b/slides/A03-do-caminho-de-ataque-ao-modelo-de-ameacas/fonte/A03-do-caminho-de-ataque-ao-modelo-de-ameacas.pptx
@@ -510,7 +510,7 @@
           <a:p>
             <a:r>
               <a:rPr lang="en-US" dirty="0"/>
-              <a:t>Colete duas observações e uma hipótese. Não aceite ransomware como fato.</a:t>
+              <a:t>Retome o inventário da A02. Colete duas observações e uma hipótese. Não aceite ransomware como fato.</a:t>
             </a:r>
             <a:endParaRPr lang="en-US" dirty="0"/>
           </a:p>
@@ -598,7 +598,7 @@
           <a:p>
             <a:r>
               <a:rPr lang="en-US" dirty="0"/>
-              <a:t>Peça hipótese alternativa administrativa: manutenção, sincronização ou rotina autorizada.</a:t>
+              <a:t>Peça um caminho possível, uma explicação administrativa alternativa e uma evidência capaz de diferenciá-los.</a:t>
             </a:r>
             <a:endParaRPr lang="en-US" dirty="0"/>
           </a:p>
@@ -686,7 +686,7 @@
           <a:p>
             <a:r>
               <a:rPr lang="en-US" dirty="0"/>
-              <a:t>Pergunte onde muda autoridade, administração ou consequência. Fronteira não é sinônimo de firewall.</a:t>
+              <a:t>Fronteira não é sinônimo de firewall. Circule mudanças de autoridade, administração, tecnologia e consequência.</a:t>
             </a:r>
             <a:endParaRPr lang="en-US" dirty="0"/>
           </a:p>
@@ -774,7 +774,7 @@
           <a:p>
             <a:r>
               <a:rPr lang="en-US" dirty="0"/>
-              <a:t>Peça uma ameaça completa. Corrija listas genéricas sem relação com o desenho.</a:t>
+              <a:t>Use o exemplo para modelar a estrutura, não para confirmar a hipótese. Depois peça outro exemplo ligado ao fluxo de engenharia.</a:t>
             </a:r>
             <a:endParaRPr lang="en-US" dirty="0"/>
           </a:p>
@@ -862,7 +862,7 @@
           <a:p>
             <a:r>
               <a:rPr lang="en-US" dirty="0"/>
-              <a:t>ATT&amp;CK não é catálogo de vulnerabilidades; CAPEC não é inventário de adversários; STRIDE não prioriza risco.</a:t>
+              <a:t>ATT&amp;CK não é vulnerabilidade; CAPEC não é grupo adversário; STRIDE não prioriza risco. Não force equivalência entre taxonomias.</a:t>
             </a:r>
             <a:endParaRPr lang="en-US" dirty="0"/>
           </a:p>
@@ -950,7 +950,7 @@
           <a:p>
             <a:r>
               <a:rPr lang="en-US" dirty="0"/>
-              <a:t>Aceite controles em camadas. Exija que o grupo preserve acesso emergencial e safety.</a:t>
+              <a:t>Vote primeiro. Depois peça que cada grupo declare o que o controle preserva, o que pode interromper e como testar segurança e continuidade.</a:t>
             </a:r>
             <a:endParaRPr lang="en-US" dirty="0"/>
           </a:p>
@@ -1038,7 +1038,7 @@
           <a:p>
             <a:r>
               <a:rPr lang="en-US" dirty="0"/>
-              <a:t>Plano B: papel A3 e cartões impressos. Nenhum comando ofensivo é necessário.</a:t>
+              <a:t>Revele um cartão por vez. Pare diante de dado real, destino externo, comando ofensivo ou proposta de indisponibilidade.</a:t>
             </a:r>
             <a:endParaRPr lang="en-US" dirty="0"/>
           </a:p>
@@ -1126,7 +1126,7 @@
           <a:p>
             <a:r>
               <a:rPr lang="en-US" dirty="0"/>
-              <a:t>Distribua o roteiro. Grupos de 3–4 com papéis rotativos.</a:t>
+              <a:t>Distribua o roteiro. Papéis: arquiteto, adversário autorizado, defensor e relator. Plano B integral: papel A3.</a:t>
             </a:r>
             <a:endParaRPr lang="en-US" dirty="0"/>
           </a:p>
@@ -1214,7 +1214,7 @@
           <a:p>
             <a:r>
               <a:rPr lang="en-US" dirty="0"/>
-              <a:t>Feche com ponto de interrupção, evidência de eficácia e risco residual.</a:t>
+              <a:t>Feche pedindo uma frase por grupo. Retome a pergunta: que operação legítima o controle pode interromper?</a:t>
             </a:r>
             <a:endParaRPr lang="en-US" dirty="0"/>
           </a:p>
@@ -1620,7 +1620,7 @@
         </p:nvSpPr>
         <p:spPr>
           <a:xfrm>
-            <a:off x="731520" y="658368"/>
+            <a:off x="731520" y="566928"/>
             <a:ext cx="5029200" cy="292608"/>
           </a:xfrm>
           <a:prstGeom prst="rect">
@@ -1656,7 +1656,7 @@
         </p:nvSpPr>
         <p:spPr>
           <a:xfrm>
-            <a:off x="731520" y="1325880"/>
+            <a:off x="731520" y="1143000"/>
             <a:ext cx="6858000" cy="1417320"/>
           </a:xfrm>
           <a:prstGeom prst="rect">
@@ -1706,8 +1706,8 @@
         </p:nvSpPr>
         <p:spPr>
           <a:xfrm>
-            <a:off x="749808" y="3154680"/>
-            <a:ext cx="6675120" cy="1005840"/>
+            <a:off x="749808" y="2852928"/>
+            <a:ext cx="6812280" cy="1170432"/>
           </a:xfrm>
           <a:prstGeom prst="rect">
             <a:avLst/>
@@ -1725,27 +1725,65 @@
               <a:buNone/>
             </a:pPr>
             <a:r>
-              <a:rPr lang="en-US" sz="2100" dirty="0">
+              <a:rPr lang="en-US" sz="1900" dirty="0">
                 <a:solidFill>
                   <a:srgbClr val="E6EEF5"/>
                 </a:solidFill>
               </a:rPr>
-              <a:t>Uma conta aparece em TI e perto da fronteira OT. O que precisa ser verdade para o caminho alcançar o processo?</a:t>
-            </a:r>
-            <a:endParaRPr lang="en-US" sz="2100" dirty="0"/>
-          </a:p>
-        </p:txBody>
-      </p:sp>
-      <p:sp>
-        <p:nvSpPr>
-          <p:cNvPr id="6" name="Shape 4"/>
-          <p:cNvSpPr/>
-          <p:nvPr/>
-        </p:nvSpPr>
-        <p:spPr>
-          <a:xfrm>
-            <a:off x="8366760" y="1417320"/>
-            <a:ext cx="2743200" cy="2880360"/>
+              <a:t>Na A02, inventariamos ativos e relações. Agora uma conta de suporte aparece no servidor de arquivos e uma sessão parte da engenharia em direção ao ambiente OT.</a:t>
+            </a:r>
+            <a:endParaRPr lang="en-US" sz="1900" dirty="0"/>
+          </a:p>
+        </p:txBody>
+      </p:sp>
+      <p:sp>
+        <p:nvSpPr>
+          <p:cNvPr id="6" name="Text 4"/>
+          <p:cNvSpPr/>
+          <p:nvPr/>
+        </p:nvSpPr>
+        <p:spPr>
+          <a:xfrm>
+            <a:off x="749808" y="4343400"/>
+            <a:ext cx="6812280" cy="786384"/>
+          </a:xfrm>
+          <a:prstGeom prst="rect">
+            <a:avLst/>
+          </a:prstGeom>
+          <a:noFill/>
+          <a:ln/>
+        </p:spPr>
+        <p:txBody>
+          <a:bodyPr wrap="square" lIns="0" tIns="0" rIns="0" bIns="0" rtlCol="0" anchor="ctr">
+            <a:normAutofit/>
+          </a:bodyPr>
+          <a:lstStyle/>
+          <a:p>
+            <a:pPr indent="0" marL="0">
+              <a:buNone/>
+            </a:pPr>
+            <a:r>
+              <a:rPr lang="en-US" sz="1800" b="1" dirty="0">
+                <a:solidFill>
+                  <a:srgbClr val="7DE0D8"/>
+                </a:solidFill>
+              </a:rPr>
+              <a:t>A missão não é confirmar ransomware: é descobrir o que precisa ser verdade para esses pontos formarem um caminho.</a:t>
+            </a:r>
+            <a:endParaRPr lang="en-US" sz="1800" dirty="0"/>
+          </a:p>
+        </p:txBody>
+      </p:sp>
+      <p:sp>
+        <p:nvSpPr>
+          <p:cNvPr id="7" name="Shape 5"/>
+          <p:cNvSpPr/>
+          <p:nvPr/>
+        </p:nvSpPr>
+        <p:spPr>
+          <a:xfrm>
+            <a:off x="8366760" y="1325880"/>
+            <a:ext cx="2743200" cy="3246120"/>
           </a:xfrm>
           <a:prstGeom prst="roundRect">
             <a:avLst/>
@@ -1763,14 +1801,14 @@
       </p:sp>
       <p:sp>
         <p:nvSpPr>
-          <p:cNvPr id="7" name="Text 5"/>
-          <p:cNvSpPr/>
-          <p:nvPr/>
-        </p:nvSpPr>
-        <p:spPr>
-          <a:xfrm>
-            <a:off x="8869680" y="1847088"/>
-            <a:ext cx="1737360" cy="1920240"/>
+          <p:cNvPr id="8" name="Text 6"/>
+          <p:cNvSpPr/>
+          <p:nvPr/>
+        </p:nvSpPr>
+        <p:spPr>
+          <a:xfrm>
+            <a:off x="8732520" y="1856232"/>
+            <a:ext cx="2011680" cy="2057400"/>
           </a:xfrm>
           <a:prstGeom prst="rect">
             <a:avLst/>
@@ -1786,76 +1824,76 @@
               <a:buNone/>
             </a:pPr>
             <a:r>
-              <a:rPr lang="en-US" sz="2700" b="1" dirty="0">
+              <a:rPr lang="en-US" sz="2400" b="1" dirty="0">
                 <a:solidFill>
                   <a:srgbClr val="FFFFFF"/>
                 </a:solidFill>
               </a:rPr>
               <a:t>TI</a:t>
             </a:r>
-            <a:endParaRPr lang="en-US" sz="2700" dirty="0"/>
+            <a:endParaRPr lang="en-US" sz="2400" dirty="0"/>
           </a:p>
           <a:p>
             <a:pPr algn="ctr" indent="0" marL="0">
               <a:buNone/>
             </a:pPr>
             <a:r>
-              <a:rPr lang="en-US" sz="2700" b="1" dirty="0">
+              <a:rPr lang="en-US" sz="2400" b="1" dirty="0">
                 <a:solidFill>
                   <a:srgbClr val="FFFFFF"/>
                 </a:solidFill>
               </a:rPr>
               <a:t>↓</a:t>
             </a:r>
-            <a:endParaRPr lang="en-US" sz="2700" dirty="0"/>
+            <a:endParaRPr lang="en-US" sz="2400" dirty="0"/>
           </a:p>
           <a:p>
             <a:pPr algn="ctr" indent="0" marL="0">
               <a:buNone/>
             </a:pPr>
             <a:r>
-              <a:rPr lang="en-US" sz="2700" b="1" dirty="0">
+              <a:rPr lang="en-US" sz="2400" b="1" dirty="0">
                 <a:solidFill>
                   <a:srgbClr val="FFFFFF"/>
                 </a:solidFill>
               </a:rPr>
-              <a:t>?</a:t>
-            </a:r>
-            <a:endParaRPr lang="en-US" sz="2700" dirty="0"/>
+              <a:t>condições?</a:t>
+            </a:r>
+            <a:endParaRPr lang="en-US" sz="2400" dirty="0"/>
           </a:p>
           <a:p>
             <a:pPr algn="ctr" indent="0" marL="0">
               <a:buNone/>
             </a:pPr>
             <a:r>
-              <a:rPr lang="en-US" sz="2700" b="1" dirty="0">
+              <a:rPr lang="en-US" sz="2400" b="1" dirty="0">
                 <a:solidFill>
                   <a:srgbClr val="FFFFFF"/>
                 </a:solidFill>
               </a:rPr>
               <a:t>↓</a:t>
             </a:r>
-            <a:endParaRPr lang="en-US" sz="2700" dirty="0"/>
+            <a:endParaRPr lang="en-US" sz="2400" dirty="0"/>
           </a:p>
           <a:p>
             <a:pPr algn="ctr" indent="0" marL="0">
               <a:buNone/>
             </a:pPr>
             <a:r>
-              <a:rPr lang="en-US" sz="2700" b="1" dirty="0">
+              <a:rPr lang="en-US" sz="2400" b="1" dirty="0">
                 <a:solidFill>
                   <a:srgbClr val="FFFFFF"/>
                 </a:solidFill>
               </a:rPr>
               <a:t>OT</a:t>
             </a:r>
-            <a:endParaRPr lang="en-US" sz="2700" dirty="0"/>
-          </a:p>
-        </p:txBody>
-      </p:sp>
-      <p:sp>
-        <p:nvSpPr>
-          <p:cNvPr id="8" name="Text 6"/>
+            <a:endParaRPr lang="en-US" sz="2400" dirty="0"/>
+          </a:p>
+        </p:txBody>
+      </p:sp>
+      <p:sp>
+        <p:nvSpPr>
+          <p:cNvPr id="9" name="Text 7"/>
           <p:cNvSpPr/>
           <p:nvPr/>
         </p:nvSpPr>
@@ -2027,7 +2065,7 @@
                   <a:srgbClr val="4B5E71"/>
                 </a:solidFill>
               </a:rPr>
-              <a:t>Correlação orienta perguntas; não encerra a investigação.</a:t>
+              <a:t>O log oferece pontos no tempo. O modelo deverá mostrar se existe um caminho entre eles.</a:t>
             </a:r>
             <a:endParaRPr lang="en-US" sz="1700" dirty="0"/>
           </a:p>
@@ -2041,8 +2079,8 @@
         </p:nvSpPr>
         <p:spPr>
           <a:xfrm>
-            <a:off x="685800" y="1965960"/>
-            <a:ext cx="7315200" cy="3429000"/>
+            <a:off x="685800" y="1993392"/>
+            <a:ext cx="6995160" cy="3310128"/>
           </a:xfrm>
           <a:prstGeom prst="roundRect">
             <a:avLst/>
@@ -2066,24 +2104,24 @@
         </p:nvSpPr>
         <p:spPr>
           <a:xfrm>
-            <a:off x="1051560" y="2487168"/>
-            <a:ext cx="6583680" cy="2148840"/>
-          </a:xfrm>
-          <a:prstGeom prst="rect">
-            <a:avLst/>
-          </a:prstGeom>
-          <a:noFill/>
-          <a:ln/>
-        </p:spPr>
-        <p:txBody>
-          <a:bodyPr wrap="square" lIns="0" tIns="0" rIns="0" bIns="0" rtlCol="0" anchor="ctr"/>
-          <a:lstStyle/>
-          <a:p>
-            <a:pPr indent="0" marL="0">
-              <a:buNone/>
-            </a:pPr>
-            <a:r>
-              <a:rPr lang="en-US" sz="1700" dirty="0">
+            <a:off x="1024128" y="2450592"/>
+            <a:ext cx="6309360" cy="2011680"/>
+          </a:xfrm>
+          <a:prstGeom prst="rect">
+            <a:avLst/>
+          </a:prstGeom>
+          <a:noFill/>
+          <a:ln/>
+        </p:spPr>
+        <p:txBody>
+          <a:bodyPr wrap="square" lIns="0" tIns="0" rIns="0" bIns="0" rtlCol="0" anchor="ctr"/>
+          <a:lstStyle/>
+          <a:p>
+            <a:pPr indent="0" marL="0">
+              <a:buNone/>
+            </a:pPr>
+            <a:r>
+              <a:rPr lang="en-US" sz="1650" dirty="0">
                 <a:solidFill>
                   <a:srgbClr val="D8F3EA"/>
                 </a:solidFill>
@@ -2093,14 +2131,14 @@
               </a:rPr>
               <a:t>08:42  VPN       svc_support  login externo</a:t>
             </a:r>
-            <a:endParaRPr lang="en-US" sz="1700" dirty="0"/>
-          </a:p>
-          <a:p>
-            <a:pPr indent="0" marL="0">
-              <a:buNone/>
-            </a:pPr>
-            <a:r>
-              <a:rPr lang="en-US" sz="1700" dirty="0">
+            <a:endParaRPr lang="en-US" sz="1650" dirty="0"/>
+          </a:p>
+          <a:p>
+            <a:pPr indent="0" marL="0">
+              <a:buNone/>
+            </a:pPr>
+            <a:r>
+              <a:rPr lang="en-US" sz="1650" dirty="0">
                 <a:solidFill>
                   <a:srgbClr val="D8F3EA"/>
                 </a:solidFill>
@@ -2110,14 +2148,14 @@
               </a:rPr>
               <a:t>08:51  FILE-01   svc_support  autenticação</a:t>
             </a:r>
-            <a:endParaRPr lang="en-US" sz="1700" dirty="0"/>
-          </a:p>
-          <a:p>
-            <a:pPr indent="0" marL="0">
-              <a:buNone/>
-            </a:pPr>
-            <a:r>
-              <a:rPr lang="en-US" sz="1700" dirty="0">
+            <a:endParaRPr lang="en-US" sz="1650" dirty="0"/>
+          </a:p>
+          <a:p>
+            <a:pPr indent="0" marL="0">
+              <a:buNone/>
+            </a:pPr>
+            <a:r>
+              <a:rPr lang="en-US" sz="1650" dirty="0">
                 <a:solidFill>
                   <a:srgbClr val="D8F3EA"/>
                 </a:solidFill>
@@ -2127,14 +2165,14 @@
               </a:rPr>
               <a:t>09:03  FILE-01   287 arquivos renomeados</a:t>
             </a:r>
-            <a:endParaRPr lang="en-US" sz="1700" dirty="0"/>
-          </a:p>
-          <a:p>
-            <a:pPr indent="0" marL="0">
-              <a:buNone/>
-            </a:pPr>
-            <a:r>
-              <a:rPr lang="en-US" sz="1700" dirty="0">
+            <a:endParaRPr lang="en-US" sz="1650" dirty="0"/>
+          </a:p>
+          <a:p>
+            <a:pPr indent="0" marL="0">
+              <a:buNone/>
+            </a:pPr>
+            <a:r>
+              <a:rPr lang="en-US" sz="1650" dirty="0">
                 <a:solidFill>
                   <a:srgbClr val="D8F3EA"/>
                 </a:solidFill>
@@ -2144,127 +2182,213 @@
               </a:rPr>
               <a:t>09:07  ENG-WS-01 → OT-JUMP-01  sessão</a:t>
             </a:r>
+            <a:endParaRPr lang="en-US" sz="1650" dirty="0"/>
+          </a:p>
+        </p:txBody>
+      </p:sp>
+      <p:sp>
+        <p:nvSpPr>
+          <p:cNvPr id="7" name="Text 5"/>
+          <p:cNvSpPr/>
+          <p:nvPr/>
+        </p:nvSpPr>
+        <p:spPr>
+          <a:xfrm>
+            <a:off x="8092440" y="2029968"/>
+            <a:ext cx="2468880" cy="274320"/>
+          </a:xfrm>
+          <a:prstGeom prst="rect">
+            <a:avLst/>
+          </a:prstGeom>
+          <a:noFill/>
+          <a:ln/>
+        </p:spPr>
+        <p:txBody>
+          <a:bodyPr wrap="square" lIns="0" tIns="0" rIns="0" bIns="0" rtlCol="0" anchor="ctr"/>
+          <a:lstStyle/>
+          <a:p>
+            <a:pPr indent="0" marL="0">
+              <a:buNone/>
+            </a:pPr>
+            <a:r>
+              <a:rPr lang="en-US" sz="1300" b="1" dirty="0">
+                <a:solidFill>
+                  <a:srgbClr val="087F7A"/>
+                </a:solidFill>
+              </a:rPr>
+              <a:t>O QUE É FATO</a:t>
+            </a:r>
+            <a:endParaRPr lang="en-US" sz="1300" dirty="0"/>
+          </a:p>
+        </p:txBody>
+      </p:sp>
+      <p:sp>
+        <p:nvSpPr>
+          <p:cNvPr id="8" name="Text 6"/>
+          <p:cNvSpPr/>
+          <p:nvPr/>
+        </p:nvSpPr>
+        <p:spPr>
+          <a:xfrm>
+            <a:off x="8092440" y="2423160"/>
+            <a:ext cx="3017520" cy="1051560"/>
+          </a:xfrm>
+          <a:prstGeom prst="rect">
+            <a:avLst/>
+          </a:prstGeom>
+          <a:noFill/>
+          <a:ln/>
+        </p:spPr>
+        <p:txBody>
+          <a:bodyPr wrap="square" lIns="0" tIns="0" rIns="0" bIns="0" rtlCol="0" anchor="ctr"/>
+          <a:lstStyle/>
+          <a:p>
+            <a:pPr indent="0" marL="0">
+              <a:buNone/>
+            </a:pPr>
+            <a:r>
+              <a:rPr lang="en-US" sz="1700" b="1" dirty="0">
+                <a:solidFill>
+                  <a:srgbClr val="12304A"/>
+                </a:solidFill>
+              </a:rPr>
+              <a:t>Eventos registrados</a:t>
+            </a:r>
             <a:endParaRPr lang="en-US" sz="1700" dirty="0"/>
           </a:p>
-        </p:txBody>
-      </p:sp>
-      <p:sp>
-        <p:nvSpPr>
-          <p:cNvPr id="7" name="Text 5"/>
-          <p:cNvSpPr/>
-          <p:nvPr/>
-        </p:nvSpPr>
-        <p:spPr>
-          <a:xfrm>
-            <a:off x="8458200" y="2194560"/>
-            <a:ext cx="2194560" cy="274320"/>
-          </a:xfrm>
-          <a:prstGeom prst="rect">
-            <a:avLst/>
-          </a:prstGeom>
-          <a:noFill/>
-          <a:ln/>
-        </p:spPr>
-        <p:txBody>
-          <a:bodyPr wrap="square" lIns="0" tIns="0" rIns="0" bIns="0" rtlCol="0" anchor="ctr"/>
-          <a:lstStyle/>
-          <a:p>
-            <a:pPr indent="0" marL="0">
-              <a:buNone/>
-            </a:pPr>
-            <a:r>
-              <a:rPr lang="en-US" sz="1400" b="1" dirty="0">
-                <a:solidFill>
-                  <a:srgbClr val="0B65C2"/>
-                </a:solidFill>
-              </a:rPr>
-              <a:t>PREVEJA</a:t>
-            </a:r>
-            <a:endParaRPr lang="en-US" sz="1400" dirty="0"/>
-          </a:p>
-        </p:txBody>
-      </p:sp>
-      <p:sp>
-        <p:nvSpPr>
-          <p:cNvPr id="8" name="Text 6"/>
-          <p:cNvSpPr/>
-          <p:nvPr/>
-        </p:nvSpPr>
-        <p:spPr>
-          <a:xfrm>
-            <a:off x="8458200" y="2743200"/>
-            <a:ext cx="2743200" cy="1828800"/>
-          </a:xfrm>
-          <a:prstGeom prst="rect">
-            <a:avLst/>
-          </a:prstGeom>
-          <a:noFill/>
-          <a:ln/>
-        </p:spPr>
-        <p:txBody>
-          <a:bodyPr wrap="square" lIns="0" tIns="0" rIns="0" bIns="0" rtlCol="0" anchor="ctr"/>
-          <a:lstStyle/>
-          <a:p>
-            <a:pPr indent="0" marL="0">
-              <a:buNone/>
-            </a:pPr>
-            <a:r>
-              <a:rPr lang="en-US" sz="1900" b="1" dirty="0">
+          <a:p>
+            <a:pPr indent="0" marL="0">
+              <a:buNone/>
+            </a:pPr>
+            <a:r>
+              <a:rPr lang="en-US" sz="1700" b="1" dirty="0">
                 <a:solidFill>
                   <a:srgbClr val="12304A"/>
                 </a:solidFill>
               </a:rPr>
-              <a:t>2 observações</a:t>
-            </a:r>
-            <a:endParaRPr lang="en-US" sz="1900" dirty="0"/>
-          </a:p>
-          <a:p>
-            <a:pPr indent="0" marL="0">
-              <a:buNone/>
-            </a:pPr>
-            <a:r>
-              <a:rPr lang="en-US" sz="1900" b="1" dirty="0">
+              <a:t>Identidades e destinos</a:t>
+            </a:r>
+            <a:endParaRPr lang="en-US" sz="1700" dirty="0"/>
+          </a:p>
+          <a:p>
+            <a:pPr indent="0" marL="0">
+              <a:buNone/>
+            </a:pPr>
+            <a:r>
+              <a:rPr lang="en-US" sz="1700" b="1" dirty="0">
                 <a:solidFill>
                   <a:srgbClr val="12304A"/>
                 </a:solidFill>
               </a:rPr>
-              <a:t>1 caminho possível</a:t>
-            </a:r>
-            <a:endParaRPr lang="en-US" sz="1900" dirty="0"/>
-          </a:p>
-          <a:p>
-            <a:pPr indent="0" marL="0">
-              <a:buNone/>
-            </a:pPr>
-            <a:r>
-              <a:rPr lang="en-US" sz="1900" b="1" dirty="0">
+              <a:t>Ordem temporal</a:t>
+            </a:r>
+            <a:endParaRPr lang="en-US" sz="1700" dirty="0"/>
+          </a:p>
+        </p:txBody>
+      </p:sp>
+      <p:sp>
+        <p:nvSpPr>
+          <p:cNvPr id="9" name="Text 7"/>
+          <p:cNvSpPr/>
+          <p:nvPr/>
+        </p:nvSpPr>
+        <p:spPr>
+          <a:xfrm>
+            <a:off x="8092440" y="3730752"/>
+            <a:ext cx="3017520" cy="274320"/>
+          </a:xfrm>
+          <a:prstGeom prst="rect">
+            <a:avLst/>
+          </a:prstGeom>
+          <a:noFill/>
+          <a:ln/>
+        </p:spPr>
+        <p:txBody>
+          <a:bodyPr wrap="square" lIns="0" tIns="0" rIns="0" bIns="0" rtlCol="0" anchor="ctr"/>
+          <a:lstStyle/>
+          <a:p>
+            <a:pPr indent="0" marL="0">
+              <a:buNone/>
+            </a:pPr>
+            <a:r>
+              <a:rPr lang="en-US" sz="1300" b="1" dirty="0">
+                <a:solidFill>
+                  <a:srgbClr val="B75D00"/>
+                </a:solidFill>
+              </a:rPr>
+              <a:t>O QUE AINDA É HIPÓTESE</a:t>
+            </a:r>
+            <a:endParaRPr lang="en-US" sz="1300" dirty="0"/>
+          </a:p>
+        </p:txBody>
+      </p:sp>
+      <p:sp>
+        <p:nvSpPr>
+          <p:cNvPr id="10" name="Text 8"/>
+          <p:cNvSpPr/>
+          <p:nvPr/>
+        </p:nvSpPr>
+        <p:spPr>
+          <a:xfrm>
+            <a:off x="8092440" y="4114800"/>
+            <a:ext cx="3017520" cy="1005840"/>
+          </a:xfrm>
+          <a:prstGeom prst="rect">
+            <a:avLst/>
+          </a:prstGeom>
+          <a:noFill/>
+          <a:ln/>
+        </p:spPr>
+        <p:txBody>
+          <a:bodyPr wrap="square" lIns="0" tIns="0" rIns="0" bIns="0" rtlCol="0" anchor="ctr"/>
+          <a:lstStyle/>
+          <a:p>
+            <a:pPr indent="0" marL="0">
+              <a:buNone/>
+            </a:pPr>
+            <a:r>
+              <a:rPr lang="en-US" sz="1700" b="1" dirty="0">
                 <a:solidFill>
                   <a:srgbClr val="12304A"/>
                 </a:solidFill>
               </a:rPr>
-              <a:t>1 alternativa</a:t>
-            </a:r>
-            <a:endParaRPr lang="en-US" sz="1900" dirty="0"/>
-          </a:p>
-          <a:p>
-            <a:pPr indent="0" marL="0">
-              <a:buNone/>
-            </a:pPr>
-            <a:r>
-              <a:rPr lang="en-US" sz="1900" b="1" dirty="0">
+              <a:t>Mesma causa</a:t>
+            </a:r>
+            <a:endParaRPr lang="en-US" sz="1700" dirty="0"/>
+          </a:p>
+          <a:p>
+            <a:pPr indent="0" marL="0">
+              <a:buNone/>
+            </a:pPr>
+            <a:r>
+              <a:rPr lang="en-US" sz="1700" b="1" dirty="0">
                 <a:solidFill>
                   <a:srgbClr val="12304A"/>
                 </a:solidFill>
               </a:rPr>
-              <a:t>1 evidência decisiva</a:t>
-            </a:r>
-            <a:endParaRPr lang="en-US" sz="1900" dirty="0"/>
-          </a:p>
-        </p:txBody>
-      </p:sp>
-      <p:sp>
-        <p:nvSpPr>
-          <p:cNvPr id="9" name="Shape 7"/>
+              <a:t>Acesso indevido</a:t>
+            </a:r>
+            <a:endParaRPr lang="en-US" sz="1700" dirty="0"/>
+          </a:p>
+          <a:p>
+            <a:pPr indent="0" marL="0">
+              <a:buNone/>
+            </a:pPr>
+            <a:r>
+              <a:rPr lang="en-US" sz="1700" b="1" dirty="0">
+                <a:solidFill>
+                  <a:srgbClr val="12304A"/>
+                </a:solidFill>
+              </a:rPr>
+              <a:t>Impacto em OT</a:t>
+            </a:r>
+            <a:endParaRPr lang="en-US" sz="1700" dirty="0"/>
+          </a:p>
+        </p:txBody>
+      </p:sp>
+      <p:sp>
+        <p:nvSpPr>
+          <p:cNvPr id="11" name="Shape 9"/>
           <p:cNvSpPr/>
           <p:nvPr/>
         </p:nvSpPr>
@@ -2287,7 +2411,7 @@
       </p:sp>
       <p:sp>
         <p:nvSpPr>
-          <p:cNvPr id="10" name="Text 8"/>
+          <p:cNvPr id="12" name="Text 10"/>
           <p:cNvSpPr/>
           <p:nvPr/>
         </p:nvSpPr>
@@ -2323,7 +2447,7 @@
       </p:sp>
       <p:sp>
         <p:nvSpPr>
-          <p:cNvPr id="11" name="Text 9"/>
+          <p:cNvPr id="13" name="Text 11"/>
           <p:cNvSpPr/>
           <p:nvPr/>
         </p:nvSpPr>
@@ -2457,7 +2581,7 @@
                   <a:srgbClr val="12304A"/>
                 </a:solidFill>
               </a:rPr>
-              <a:t>Desenhe o fluxo normal antes do abuso</a:t>
+              <a:t>Reconstrua o funcionamento normal antes do abuso</a:t>
             </a:r>
             <a:endParaRPr lang="en-US" sz="3000" dirty="0"/>
           </a:p>
@@ -2495,7 +2619,7 @@
                   <a:srgbClr val="4B5E71"/>
                 </a:solidFill>
               </a:rPr>
-              <a:t>Ativos, dados, direção e confiança tornam o caminho discutível.</a:t>
+              <a:t>Sem o fluxo legítimo, qualquer seta parece ataque e qualquer bloqueio parece solução.</a:t>
             </a:r>
             <a:endParaRPr lang="en-US" sz="1700" dirty="0"/>
           </a:p>
@@ -2509,8 +2633,8 @@
         </p:nvSpPr>
         <p:spPr>
           <a:xfrm>
-            <a:off x="502920" y="2468880"/>
-            <a:ext cx="1874520" cy="1051560"/>
+            <a:off x="411480" y="2286000"/>
+            <a:ext cx="1938528" cy="1005840"/>
           </a:xfrm>
           <a:prstGeom prst="roundRect">
             <a:avLst/>
@@ -2534,8 +2658,8 @@
         </p:nvSpPr>
         <p:spPr>
           <a:xfrm>
-            <a:off x="594360" y="2816352"/>
-            <a:ext cx="1691640" cy="274320"/>
+            <a:off x="502920" y="2587752"/>
+            <a:ext cx="1755648" cy="274320"/>
           </a:xfrm>
           <a:prstGeom prst="rect">
             <a:avLst/>
@@ -2551,27 +2675,63 @@
               <a:buNone/>
             </a:pPr>
             <a:r>
-              <a:rPr lang="en-US" sz="1500" b="1" dirty="0">
+              <a:rPr lang="en-US" sz="1400" b="1" dirty="0">
                 <a:solidFill>
                   <a:srgbClr val="FFFFFF"/>
                 </a:solidFill>
               </a:rPr>
               <a:t>SUPORTE</a:t>
             </a:r>
-            <a:endParaRPr lang="en-US" sz="1500" dirty="0"/>
-          </a:p>
-        </p:txBody>
-      </p:sp>
-      <p:sp>
-        <p:nvSpPr>
-          <p:cNvPr id="7" name="Shape 5"/>
-          <p:cNvSpPr/>
-          <p:nvPr/>
-        </p:nvSpPr>
-        <p:spPr>
-          <a:xfrm>
-            <a:off x="2404872" y="2779776"/>
-            <a:ext cx="320040" cy="438912"/>
+            <a:endParaRPr lang="en-US" sz="1400" dirty="0"/>
+          </a:p>
+        </p:txBody>
+      </p:sp>
+      <p:sp>
+        <p:nvSpPr>
+          <p:cNvPr id="7" name="Text 5"/>
+          <p:cNvSpPr/>
+          <p:nvPr/>
+        </p:nvSpPr>
+        <p:spPr>
+          <a:xfrm>
+            <a:off x="521208" y="3456432"/>
+            <a:ext cx="1719072" cy="274320"/>
+          </a:xfrm>
+          <a:prstGeom prst="rect">
+            <a:avLst/>
+          </a:prstGeom>
+          <a:noFill/>
+          <a:ln/>
+        </p:spPr>
+        <p:txBody>
+          <a:bodyPr wrap="square" lIns="0" tIns="0" rIns="0" bIns="0" rtlCol="0" anchor="ctr"/>
+          <a:lstStyle/>
+          <a:p>
+            <a:pPr algn="ctr" indent="0" marL="0">
+              <a:buNone/>
+            </a:pPr>
+            <a:r>
+              <a:rPr lang="en-US" sz="1300" dirty="0">
+                <a:solidFill>
+                  <a:srgbClr val="4B5E71"/>
+                </a:solidFill>
+              </a:rPr>
+              <a:t>administra</a:t>
+            </a:r>
+            <a:endParaRPr lang="en-US" sz="1300" dirty="0"/>
+          </a:p>
+        </p:txBody>
+      </p:sp>
+      <p:sp>
+        <p:nvSpPr>
+          <p:cNvPr id="8" name="Shape 6"/>
+          <p:cNvSpPr/>
+          <p:nvPr/>
+        </p:nvSpPr>
+        <p:spPr>
+          <a:xfrm>
+            <a:off x="2350008" y="2578608"/>
+            <a:ext cx="329184" cy="438912"/>
           </a:xfrm>
           <a:prstGeom prst="chevron">
             <a:avLst/>
@@ -2589,14 +2749,14 @@
       </p:sp>
       <p:sp>
         <p:nvSpPr>
-          <p:cNvPr id="8" name="Shape 6"/>
-          <p:cNvSpPr/>
-          <p:nvPr/>
-        </p:nvSpPr>
-        <p:spPr>
-          <a:xfrm>
-            <a:off x="2788920" y="2468880"/>
-            <a:ext cx="1874520" cy="1051560"/>
+          <p:cNvPr id="9" name="Shape 7"/>
+          <p:cNvSpPr/>
+          <p:nvPr/>
+        </p:nvSpPr>
+        <p:spPr>
+          <a:xfrm>
+            <a:off x="2697480" y="2286000"/>
+            <a:ext cx="1938528" cy="1005840"/>
           </a:xfrm>
           <a:prstGeom prst="roundRect">
             <a:avLst/>
@@ -2614,14 +2774,14 @@
       </p:sp>
       <p:sp>
         <p:nvSpPr>
-          <p:cNvPr id="9" name="Text 7"/>
-          <p:cNvSpPr/>
-          <p:nvPr/>
-        </p:nvSpPr>
-        <p:spPr>
-          <a:xfrm>
-            <a:off x="2880360" y="2816352"/>
-            <a:ext cx="1691640" cy="274320"/>
+          <p:cNvPr id="10" name="Text 8"/>
+          <p:cNvSpPr/>
+          <p:nvPr/>
+        </p:nvSpPr>
+        <p:spPr>
+          <a:xfrm>
+            <a:off x="2788920" y="2587752"/>
+            <a:ext cx="1755648" cy="274320"/>
           </a:xfrm>
           <a:prstGeom prst="rect">
             <a:avLst/>
@@ -2637,27 +2797,63 @@
               <a:buNone/>
             </a:pPr>
             <a:r>
-              <a:rPr lang="en-US" sz="1500" b="1" dirty="0">
+              <a:rPr lang="en-US" sz="1400" b="1" dirty="0">
                 <a:solidFill>
                   <a:srgbClr val="FFFFFF"/>
                 </a:solidFill>
               </a:rPr>
               <a:t>VPN</a:t>
             </a:r>
-            <a:endParaRPr lang="en-US" sz="1500" dirty="0"/>
-          </a:p>
-        </p:txBody>
-      </p:sp>
-      <p:sp>
-        <p:nvSpPr>
-          <p:cNvPr id="10" name="Shape 8"/>
-          <p:cNvSpPr/>
-          <p:nvPr/>
-        </p:nvSpPr>
-        <p:spPr>
-          <a:xfrm>
-            <a:off x="4690872" y="2779776"/>
-            <a:ext cx="320040" cy="438912"/>
+            <a:endParaRPr lang="en-US" sz="1400" dirty="0"/>
+          </a:p>
+        </p:txBody>
+      </p:sp>
+      <p:sp>
+        <p:nvSpPr>
+          <p:cNvPr id="11" name="Text 9"/>
+          <p:cNvSpPr/>
+          <p:nvPr/>
+        </p:nvSpPr>
+        <p:spPr>
+          <a:xfrm>
+            <a:off x="2807208" y="3456432"/>
+            <a:ext cx="1719072" cy="274320"/>
+          </a:xfrm>
+          <a:prstGeom prst="rect">
+            <a:avLst/>
+          </a:prstGeom>
+          <a:noFill/>
+          <a:ln/>
+        </p:spPr>
+        <p:txBody>
+          <a:bodyPr wrap="square" lIns="0" tIns="0" rIns="0" bIns="0" rtlCol="0" anchor="ctr"/>
+          <a:lstStyle/>
+          <a:p>
+            <a:pPr algn="ctr" indent="0" marL="0">
+              <a:buNone/>
+            </a:pPr>
+            <a:r>
+              <a:rPr lang="en-US" sz="1300" dirty="0">
+                <a:solidFill>
+                  <a:srgbClr val="4B5E71"/>
+                </a:solidFill>
+              </a:rPr>
+              <a:t>autentica</a:t>
+            </a:r>
+            <a:endParaRPr lang="en-US" sz="1300" dirty="0"/>
+          </a:p>
+        </p:txBody>
+      </p:sp>
+      <p:sp>
+        <p:nvSpPr>
+          <p:cNvPr id="12" name="Shape 10"/>
+          <p:cNvSpPr/>
+          <p:nvPr/>
+        </p:nvSpPr>
+        <p:spPr>
+          <a:xfrm>
+            <a:off x="4636008" y="2578608"/>
+            <a:ext cx="329184" cy="438912"/>
           </a:xfrm>
           <a:prstGeom prst="chevron">
             <a:avLst/>
@@ -2675,14 +2871,14 @@
       </p:sp>
       <p:sp>
         <p:nvSpPr>
-          <p:cNvPr id="11" name="Shape 9"/>
-          <p:cNvSpPr/>
-          <p:nvPr/>
-        </p:nvSpPr>
-        <p:spPr>
-          <a:xfrm>
-            <a:off x="5074920" y="2468880"/>
-            <a:ext cx="1874520" cy="1051560"/>
+          <p:cNvPr id="13" name="Shape 11"/>
+          <p:cNvSpPr/>
+          <p:nvPr/>
+        </p:nvSpPr>
+        <p:spPr>
+          <a:xfrm>
+            <a:off x="4983480" y="2286000"/>
+            <a:ext cx="1938528" cy="1005840"/>
           </a:xfrm>
           <a:prstGeom prst="roundRect">
             <a:avLst/>
@@ -2700,14 +2896,14 @@
       </p:sp>
       <p:sp>
         <p:nvSpPr>
-          <p:cNvPr id="12" name="Text 10"/>
-          <p:cNvSpPr/>
-          <p:nvPr/>
-        </p:nvSpPr>
-        <p:spPr>
-          <a:xfrm>
-            <a:off x="5166360" y="2816352"/>
-            <a:ext cx="1691640" cy="274320"/>
+          <p:cNvPr id="14" name="Text 12"/>
+          <p:cNvSpPr/>
+          <p:nvPr/>
+        </p:nvSpPr>
+        <p:spPr>
+          <a:xfrm>
+            <a:off x="5074920" y="2587752"/>
+            <a:ext cx="1755648" cy="274320"/>
           </a:xfrm>
           <a:prstGeom prst="rect">
             <a:avLst/>
@@ -2723,27 +2919,63 @@
               <a:buNone/>
             </a:pPr>
             <a:r>
-              <a:rPr lang="en-US" sz="1500" b="1" dirty="0">
+              <a:rPr lang="en-US" sz="1400" b="1" dirty="0">
                 <a:solidFill>
                   <a:srgbClr val="FFFFFF"/>
                 </a:solidFill>
               </a:rPr>
               <a:t>ARQUIVOS</a:t>
             </a:r>
-            <a:endParaRPr lang="en-US" sz="1500" dirty="0"/>
-          </a:p>
-        </p:txBody>
-      </p:sp>
-      <p:sp>
-        <p:nvSpPr>
-          <p:cNvPr id="13" name="Shape 11"/>
-          <p:cNvSpPr/>
-          <p:nvPr/>
-        </p:nvSpPr>
-        <p:spPr>
-          <a:xfrm>
-            <a:off x="6976872" y="2779776"/>
-            <a:ext cx="320040" cy="438912"/>
+            <a:endParaRPr lang="en-US" sz="1400" dirty="0"/>
+          </a:p>
+        </p:txBody>
+      </p:sp>
+      <p:sp>
+        <p:nvSpPr>
+          <p:cNvPr id="15" name="Text 13"/>
+          <p:cNvSpPr/>
+          <p:nvPr/>
+        </p:nvSpPr>
+        <p:spPr>
+          <a:xfrm>
+            <a:off x="5093208" y="3456432"/>
+            <a:ext cx="1719072" cy="274320"/>
+          </a:xfrm>
+          <a:prstGeom prst="rect">
+            <a:avLst/>
+          </a:prstGeom>
+          <a:noFill/>
+          <a:ln/>
+        </p:spPr>
+        <p:txBody>
+          <a:bodyPr wrap="square" lIns="0" tIns="0" rIns="0" bIns="0" rtlCol="0" anchor="ctr"/>
+          <a:lstStyle/>
+          <a:p>
+            <a:pPr algn="ctr" indent="0" marL="0">
+              <a:buNone/>
+            </a:pPr>
+            <a:r>
+              <a:rPr lang="en-US" sz="1300" dirty="0">
+                <a:solidFill>
+                  <a:srgbClr val="4B5E71"/>
+                </a:solidFill>
+              </a:rPr>
+              <a:t>compartilha</a:t>
+            </a:r>
+            <a:endParaRPr lang="en-US" sz="1300" dirty="0"/>
+          </a:p>
+        </p:txBody>
+      </p:sp>
+      <p:sp>
+        <p:nvSpPr>
+          <p:cNvPr id="16" name="Shape 14"/>
+          <p:cNvSpPr/>
+          <p:nvPr/>
+        </p:nvSpPr>
+        <p:spPr>
+          <a:xfrm>
+            <a:off x="6922008" y="2578608"/>
+            <a:ext cx="329184" cy="438912"/>
           </a:xfrm>
           <a:prstGeom prst="chevron">
             <a:avLst/>
@@ -2761,14 +2993,14 @@
       </p:sp>
       <p:sp>
         <p:nvSpPr>
-          <p:cNvPr id="14" name="Shape 12"/>
-          <p:cNvSpPr/>
-          <p:nvPr/>
-        </p:nvSpPr>
-        <p:spPr>
-          <a:xfrm>
-            <a:off x="7360920" y="2468880"/>
-            <a:ext cx="1874520" cy="1051560"/>
+          <p:cNvPr id="17" name="Shape 15"/>
+          <p:cNvSpPr/>
+          <p:nvPr/>
+        </p:nvSpPr>
+        <p:spPr>
+          <a:xfrm>
+            <a:off x="7269480" y="2286000"/>
+            <a:ext cx="1938528" cy="1005840"/>
           </a:xfrm>
           <a:prstGeom prst="roundRect">
             <a:avLst/>
@@ -2786,14 +3018,14 @@
       </p:sp>
       <p:sp>
         <p:nvSpPr>
-          <p:cNvPr id="15" name="Text 13"/>
-          <p:cNvSpPr/>
-          <p:nvPr/>
-        </p:nvSpPr>
-        <p:spPr>
-          <a:xfrm>
-            <a:off x="7452360" y="2816352"/>
-            <a:ext cx="1691640" cy="274320"/>
+          <p:cNvPr id="18" name="Text 16"/>
+          <p:cNvSpPr/>
+          <p:nvPr/>
+        </p:nvSpPr>
+        <p:spPr>
+          <a:xfrm>
+            <a:off x="7360920" y="2587752"/>
+            <a:ext cx="1755648" cy="274320"/>
           </a:xfrm>
           <a:prstGeom prst="rect">
             <a:avLst/>
@@ -2809,27 +3041,63 @@
               <a:buNone/>
             </a:pPr>
             <a:r>
-              <a:rPr lang="en-US" sz="1500" b="1" dirty="0">
+              <a:rPr lang="en-US" sz="1400" b="1" dirty="0">
                 <a:solidFill>
                   <a:srgbClr val="FFFFFF"/>
                 </a:solidFill>
               </a:rPr>
               <a:t>ENG. WS</a:t>
             </a:r>
-            <a:endParaRPr lang="en-US" sz="1500" dirty="0"/>
-          </a:p>
-        </p:txBody>
-      </p:sp>
-      <p:sp>
-        <p:nvSpPr>
-          <p:cNvPr id="16" name="Shape 14"/>
-          <p:cNvSpPr/>
-          <p:nvPr/>
-        </p:nvSpPr>
-        <p:spPr>
-          <a:xfrm>
-            <a:off x="9262872" y="2779776"/>
-            <a:ext cx="320040" cy="438912"/>
+            <a:endParaRPr lang="en-US" sz="1400" dirty="0"/>
+          </a:p>
+        </p:txBody>
+      </p:sp>
+      <p:sp>
+        <p:nvSpPr>
+          <p:cNvPr id="19" name="Text 17"/>
+          <p:cNvSpPr/>
+          <p:nvPr/>
+        </p:nvSpPr>
+        <p:spPr>
+          <a:xfrm>
+            <a:off x="7379208" y="3456432"/>
+            <a:ext cx="1719072" cy="274320"/>
+          </a:xfrm>
+          <a:prstGeom prst="rect">
+            <a:avLst/>
+          </a:prstGeom>
+          <a:noFill/>
+          <a:ln/>
+        </p:spPr>
+        <p:txBody>
+          <a:bodyPr wrap="square" lIns="0" tIns="0" rIns="0" bIns="0" rtlCol="0" anchor="ctr"/>
+          <a:lstStyle/>
+          <a:p>
+            <a:pPr algn="ctr" indent="0" marL="0">
+              <a:buNone/>
+            </a:pPr>
+            <a:r>
+              <a:rPr lang="en-US" sz="1300" dirty="0">
+                <a:solidFill>
+                  <a:srgbClr val="4B5E71"/>
+                </a:solidFill>
+              </a:rPr>
+              <a:t>programa</a:t>
+            </a:r>
+            <a:endParaRPr lang="en-US" sz="1300" dirty="0"/>
+          </a:p>
+        </p:txBody>
+      </p:sp>
+      <p:sp>
+        <p:nvSpPr>
+          <p:cNvPr id="20" name="Shape 18"/>
+          <p:cNvSpPr/>
+          <p:nvPr/>
+        </p:nvSpPr>
+        <p:spPr>
+          <a:xfrm>
+            <a:off x="9208008" y="2578608"/>
+            <a:ext cx="329184" cy="438912"/>
           </a:xfrm>
           <a:prstGeom prst="chevron">
             <a:avLst/>
@@ -2847,14 +3115,14 @@
       </p:sp>
       <p:sp>
         <p:nvSpPr>
-          <p:cNvPr id="17" name="Shape 15"/>
-          <p:cNvSpPr/>
-          <p:nvPr/>
-        </p:nvSpPr>
-        <p:spPr>
-          <a:xfrm>
-            <a:off x="9646920" y="2468880"/>
-            <a:ext cx="1874520" cy="1051560"/>
+          <p:cNvPr id="21" name="Shape 19"/>
+          <p:cNvSpPr/>
+          <p:nvPr/>
+        </p:nvSpPr>
+        <p:spPr>
+          <a:xfrm>
+            <a:off x="9555480" y="2286000"/>
+            <a:ext cx="1938528" cy="1005840"/>
           </a:xfrm>
           <a:prstGeom prst="roundRect">
             <a:avLst/>
@@ -2872,14 +3140,14 @@
       </p:sp>
       <p:sp>
         <p:nvSpPr>
-          <p:cNvPr id="18" name="Text 16"/>
-          <p:cNvSpPr/>
-          <p:nvPr/>
-        </p:nvSpPr>
-        <p:spPr>
-          <a:xfrm>
-            <a:off x="9738360" y="2816352"/>
-            <a:ext cx="1691640" cy="274320"/>
+          <p:cNvPr id="22" name="Text 20"/>
+          <p:cNvSpPr/>
+          <p:nvPr/>
+        </p:nvSpPr>
+        <p:spPr>
+          <a:xfrm>
+            <a:off x="9646920" y="2587752"/>
+            <a:ext cx="1755648" cy="274320"/>
           </a:xfrm>
           <a:prstGeom prst="rect">
             <a:avLst/>
@@ -2895,27 +3163,63 @@
               <a:buNone/>
             </a:pPr>
             <a:r>
-              <a:rPr lang="en-US" sz="1500" b="1" dirty="0">
+              <a:rPr lang="en-US" sz="1400" b="1" dirty="0">
                 <a:solidFill>
                   <a:srgbClr val="FFFFFF"/>
                 </a:solidFill>
               </a:rPr>
               <a:t>OT JUMP</a:t>
             </a:r>
-            <a:endParaRPr lang="en-US" sz="1500" dirty="0"/>
-          </a:p>
-        </p:txBody>
-      </p:sp>
-      <p:sp>
-        <p:nvSpPr>
-          <p:cNvPr id="19" name="Shape 17"/>
-          <p:cNvSpPr/>
-          <p:nvPr/>
-        </p:nvSpPr>
-        <p:spPr>
-          <a:xfrm>
-            <a:off x="9052560" y="1920240"/>
-            <a:ext cx="0" cy="2331720"/>
+            <a:endParaRPr lang="en-US" sz="1400" dirty="0"/>
+          </a:p>
+        </p:txBody>
+      </p:sp>
+      <p:sp>
+        <p:nvSpPr>
+          <p:cNvPr id="23" name="Text 21"/>
+          <p:cNvSpPr/>
+          <p:nvPr/>
+        </p:nvSpPr>
+        <p:spPr>
+          <a:xfrm>
+            <a:off x="9665208" y="3456432"/>
+            <a:ext cx="1719072" cy="274320"/>
+          </a:xfrm>
+          <a:prstGeom prst="rect">
+            <a:avLst/>
+          </a:prstGeom>
+          <a:noFill/>
+          <a:ln/>
+        </p:spPr>
+        <p:txBody>
+          <a:bodyPr wrap="square" lIns="0" tIns="0" rIns="0" bIns="0" rtlCol="0" anchor="ctr"/>
+          <a:lstStyle/>
+          <a:p>
+            <a:pPr algn="ctr" indent="0" marL="0">
+              <a:buNone/>
+            </a:pPr>
+            <a:r>
+              <a:rPr lang="en-US" sz="1300" dirty="0">
+                <a:solidFill>
+                  <a:srgbClr val="4B5E71"/>
+                </a:solidFill>
+              </a:rPr>
+              <a:t>intermedeia</a:t>
+            </a:r>
+            <a:endParaRPr lang="en-US" sz="1300" dirty="0"/>
+          </a:p>
+        </p:txBody>
+      </p:sp>
+      <p:sp>
+        <p:nvSpPr>
+          <p:cNvPr id="24" name="Shape 22"/>
+          <p:cNvSpPr/>
+          <p:nvPr/>
+        </p:nvSpPr>
+        <p:spPr>
+          <a:xfrm>
+            <a:off x="8979408" y="1874520"/>
+            <a:ext cx="0" cy="2057400"/>
           </a:xfrm>
           <a:prstGeom prst="line">
             <a:avLst/>
@@ -2931,91 +3235,57 @@
       </p:sp>
       <p:sp>
         <p:nvSpPr>
-          <p:cNvPr id="20" name="Text 18"/>
+          <p:cNvPr id="25" name="Text 23"/>
           <p:cNvSpPr/>
           <p:nvPr/>
         </p:nvSpPr>
         <p:spPr>
           <a:xfrm rot="16200000">
-            <a:off x="8302752" y="4160520"/>
-            <a:ext cx="1508760" cy="365760"/>
-          </a:xfrm>
-          <a:prstGeom prst="rect">
-            <a:avLst/>
-          </a:prstGeom>
-          <a:noFill/>
-          <a:ln/>
-        </p:spPr>
-        <p:txBody>
-          <a:bodyPr wrap="square" lIns="0" tIns="0" rIns="0" bIns="0" rtlCol="0" anchor="ctr"/>
-          <a:lstStyle/>
-          <a:p>
-            <a:pPr indent="0" marL="0">
-              <a:buNone/>
-            </a:pPr>
-            <a:r>
-              <a:rPr lang="en-US" sz="1200" b="1" dirty="0">
+            <a:off x="8247888" y="4160520"/>
+            <a:ext cx="1463040" cy="320040"/>
+          </a:xfrm>
+          <a:prstGeom prst="rect">
+            <a:avLst/>
+          </a:prstGeom>
+          <a:noFill/>
+          <a:ln/>
+        </p:spPr>
+        <p:txBody>
+          <a:bodyPr wrap="square" lIns="0" tIns="0" rIns="0" bIns="0" rtlCol="0" anchor="ctr"/>
+          <a:lstStyle/>
+          <a:p>
+            <a:pPr indent="0" marL="0">
+              <a:buNone/>
+            </a:pPr>
+            <a:r>
+              <a:rPr lang="en-US" sz="1100" b="1" dirty="0">
                 <a:solidFill>
                   <a:srgbClr val="B42318"/>
                 </a:solidFill>
               </a:rPr>
               <a:t>FRONTEIRA TI/OT</a:t>
             </a:r>
-            <a:endParaRPr lang="en-US" sz="1200" dirty="0"/>
-          </a:p>
-        </p:txBody>
-      </p:sp>
-      <p:sp>
-        <p:nvSpPr>
-          <p:cNvPr id="21" name="Text 19"/>
-          <p:cNvSpPr/>
-          <p:nvPr/>
-        </p:nvSpPr>
-        <p:spPr>
-          <a:xfrm>
-            <a:off x="914400" y="5074920"/>
-            <a:ext cx="10241280" cy="502920"/>
-          </a:xfrm>
-          <a:prstGeom prst="rect">
-            <a:avLst/>
-          </a:prstGeom>
-          <a:noFill/>
-          <a:ln/>
-        </p:spPr>
-        <p:txBody>
-          <a:bodyPr wrap="square" lIns="0" tIns="0" rIns="0" bIns="0" rtlCol="0" anchor="ctr"/>
-          <a:lstStyle/>
-          <a:p>
-            <a:pPr algn="ctr" indent="0" marL="0">
-              <a:buNone/>
-            </a:pPr>
-            <a:r>
-              <a:rPr lang="en-US" sz="2000" b="1" dirty="0">
-                <a:solidFill>
-                  <a:srgbClr val="12304A"/>
-                </a:solidFill>
-              </a:rPr>
-              <a:t>Rotule cada fluxo: o quê, direção, identidade e controle.</a:t>
-            </a:r>
-            <a:endParaRPr lang="en-US" sz="2000" dirty="0"/>
-          </a:p>
-        </p:txBody>
-      </p:sp>
-      <p:sp>
-        <p:nvSpPr>
-          <p:cNvPr id="22" name="Shape 20"/>
-          <p:cNvSpPr/>
-          <p:nvPr/>
-        </p:nvSpPr>
-        <p:spPr>
-          <a:xfrm>
-            <a:off x="548640" y="6473952"/>
-            <a:ext cx="11018520" cy="0"/>
-          </a:xfrm>
-          <a:prstGeom prst="line">
-            <a:avLst/>
-          </a:prstGeom>
-          <a:noFill/>
+            <a:endParaRPr lang="en-US" sz="1100" dirty="0"/>
+          </a:p>
+        </p:txBody>
+      </p:sp>
+      <p:sp>
+        <p:nvSpPr>
+          <p:cNvPr id="26" name="Shape 24"/>
+          <p:cNvSpPr/>
+          <p:nvPr/>
+        </p:nvSpPr>
+        <p:spPr>
+          <a:xfrm>
+            <a:off x="822960" y="4709160"/>
+            <a:ext cx="10561320" cy="932688"/>
+          </a:xfrm>
+          <a:prstGeom prst="roundRect">
+            <a:avLst/>
+          </a:prstGeom>
+          <a:solidFill>
+            <a:srgbClr val="E7F0F8"/>
+          </a:solidFill>
           <a:ln w="12700">
             <a:solidFill>
               <a:srgbClr val="C9D4DF"/>
@@ -3026,7 +3296,66 @@
       </p:sp>
       <p:sp>
         <p:nvSpPr>
-          <p:cNvPr id="23" name="Text 21"/>
+          <p:cNvPr id="27" name="Text 25"/>
+          <p:cNvSpPr/>
+          <p:nvPr/>
+        </p:nvSpPr>
+        <p:spPr>
+          <a:xfrm>
+            <a:off x="1078992" y="4992624"/>
+            <a:ext cx="10058400" cy="347472"/>
+          </a:xfrm>
+          <a:prstGeom prst="rect">
+            <a:avLst/>
+          </a:prstGeom>
+          <a:noFill/>
+          <a:ln/>
+        </p:spPr>
+        <p:txBody>
+          <a:bodyPr wrap="square" lIns="0" tIns="0" rIns="0" bIns="0" rtlCol="0" anchor="ctr"/>
+          <a:lstStyle/>
+          <a:p>
+            <a:pPr algn="ctr" indent="0" marL="0">
+              <a:buNone/>
+            </a:pPr>
+            <a:r>
+              <a:rPr lang="en-US" sz="1800" b="1" dirty="0">
+                <a:solidFill>
+                  <a:srgbClr val="12304A"/>
+                </a:solidFill>
+              </a:rPr>
+              <a:t>Em cada ligação, pergunte: o que atravessa? quem autoriza? qual controle existe? o que muda se a confiança falhar?</a:t>
+            </a:r>
+            <a:endParaRPr lang="en-US" sz="1800" dirty="0"/>
+          </a:p>
+        </p:txBody>
+      </p:sp>
+      <p:sp>
+        <p:nvSpPr>
+          <p:cNvPr id="28" name="Shape 26"/>
+          <p:cNvSpPr/>
+          <p:nvPr/>
+        </p:nvSpPr>
+        <p:spPr>
+          <a:xfrm>
+            <a:off x="548640" y="6473952"/>
+            <a:ext cx="11018520" cy="0"/>
+          </a:xfrm>
+          <a:prstGeom prst="line">
+            <a:avLst/>
+          </a:prstGeom>
+          <a:noFill/>
+          <a:ln w="12700">
+            <a:solidFill>
+              <a:srgbClr val="C9D4DF"/>
+            </a:solidFill>
+            <a:prstDash val="solid"/>
+          </a:ln>
+        </p:spPr>
+      </p:sp>
+      <p:sp>
+        <p:nvSpPr>
+          <p:cNvPr id="29" name="Text 27"/>
           <p:cNvSpPr/>
           <p:nvPr/>
         </p:nvSpPr>
@@ -3062,7 +3391,7 @@
       </p:sp>
       <p:sp>
         <p:nvSpPr>
-          <p:cNvPr id="24" name="Text 22"/>
+          <p:cNvPr id="30" name="Text 28"/>
           <p:cNvSpPr/>
           <p:nvPr/>
         </p:nvSpPr>
@@ -3196,7 +3525,7 @@
                   <a:srgbClr val="12304A"/>
                 </a:solidFill>
               </a:rPr>
-              <a:t>Seis lentes para gerar ameaças testáveis</a:t>
+              <a:t>Transforme suspeita em ameaça testável</a:t>
             </a:r>
             <a:endParaRPr lang="en-US" sz="3000" dirty="0"/>
           </a:p>
@@ -3234,7 +3563,7 @@
                   <a:srgbClr val="4B5E71"/>
                 </a:solidFill>
               </a:rPr>
-              <a:t>Use somente categorias que façam sentido no elemento ou fluxo.</a:t>
+              <a:t>A categoria só é útil quando aponta condição, consequência e evidência no sistema desenhado.</a:t>
             </a:r>
             <a:endParaRPr lang="en-US" sz="1700" dirty="0"/>
           </a:p>
@@ -3248,8 +3577,8 @@
         </p:nvSpPr>
         <p:spPr>
           <a:xfrm>
-            <a:off x="594360" y="2011680"/>
-            <a:ext cx="3474720" cy="1234440"/>
+            <a:off x="502920" y="1965960"/>
+            <a:ext cx="2267712" cy="914400"/>
           </a:xfrm>
           <a:prstGeom prst="roundRect">
             <a:avLst/>
@@ -3273,8 +3602,8 @@
         </p:nvSpPr>
         <p:spPr>
           <a:xfrm>
-            <a:off x="777240" y="2194560"/>
-            <a:ext cx="3108960" cy="274320"/>
+            <a:off x="685800" y="2148840"/>
+            <a:ext cx="1901952" cy="274320"/>
           </a:xfrm>
           <a:prstGeom prst="rect">
             <a:avLst/>
@@ -3309,8 +3638,8 @@
         </p:nvSpPr>
         <p:spPr>
           <a:xfrm>
-            <a:off x="777240" y="2670048"/>
-            <a:ext cx="3108960" cy="411480"/>
+            <a:off x="685800" y="2624328"/>
+            <a:ext cx="1901952" cy="91440"/>
           </a:xfrm>
           <a:prstGeom prst="rect">
             <a:avLst/>
@@ -3347,8 +3676,8 @@
         </p:nvSpPr>
         <p:spPr>
           <a:xfrm>
-            <a:off x="4434840" y="2011680"/>
-            <a:ext cx="3474720" cy="1234440"/>
+            <a:off x="2990088" y="1965960"/>
+            <a:ext cx="2267712" cy="914400"/>
           </a:xfrm>
           <a:prstGeom prst="roundRect">
             <a:avLst/>
@@ -3372,8 +3701,8 @@
         </p:nvSpPr>
         <p:spPr>
           <a:xfrm>
-            <a:off x="4617720" y="2194560"/>
-            <a:ext cx="3108960" cy="274320"/>
+            <a:off x="3172968" y="2148840"/>
+            <a:ext cx="1901952" cy="274320"/>
           </a:xfrm>
           <a:prstGeom prst="rect">
             <a:avLst/>
@@ -3408,8 +3737,8 @@
         </p:nvSpPr>
         <p:spPr>
           <a:xfrm>
-            <a:off x="4617720" y="2670048"/>
-            <a:ext cx="3108960" cy="411480"/>
+            <a:off x="3172968" y="2624328"/>
+            <a:ext cx="1901952" cy="91440"/>
           </a:xfrm>
           <a:prstGeom prst="rect">
             <a:avLst/>
@@ -3446,8 +3775,8 @@
         </p:nvSpPr>
         <p:spPr>
           <a:xfrm>
-            <a:off x="8275320" y="2011680"/>
-            <a:ext cx="3474720" cy="1234440"/>
+            <a:off x="5477256" y="1965960"/>
+            <a:ext cx="2267712" cy="914400"/>
           </a:xfrm>
           <a:prstGeom prst="roundRect">
             <a:avLst/>
@@ -3471,8 +3800,8 @@
         </p:nvSpPr>
         <p:spPr>
           <a:xfrm>
-            <a:off x="8458200" y="2194560"/>
-            <a:ext cx="3108960" cy="274320"/>
+            <a:off x="5660136" y="2148840"/>
+            <a:ext cx="1901952" cy="274320"/>
           </a:xfrm>
           <a:prstGeom prst="rect">
             <a:avLst/>
@@ -3507,8 +3836,8 @@
         </p:nvSpPr>
         <p:spPr>
           <a:xfrm>
-            <a:off x="8458200" y="2670048"/>
-            <a:ext cx="3108960" cy="411480"/>
+            <a:off x="5660136" y="2624328"/>
+            <a:ext cx="1901952" cy="91440"/>
           </a:xfrm>
           <a:prstGeom prst="rect">
             <a:avLst/>
@@ -3545,8 +3874,8 @@
         </p:nvSpPr>
         <p:spPr>
           <a:xfrm>
-            <a:off x="594360" y="3566160"/>
-            <a:ext cx="3474720" cy="1234440"/>
+            <a:off x="502920" y="3081528"/>
+            <a:ext cx="2267712" cy="914400"/>
           </a:xfrm>
           <a:prstGeom prst="roundRect">
             <a:avLst/>
@@ -3570,8 +3899,8 @@
         </p:nvSpPr>
         <p:spPr>
           <a:xfrm>
-            <a:off x="777240" y="3749040"/>
-            <a:ext cx="3108960" cy="274320"/>
+            <a:off x="685800" y="3264408"/>
+            <a:ext cx="1901952" cy="274320"/>
           </a:xfrm>
           <a:prstGeom prst="rect">
             <a:avLst/>
@@ -3606,8 +3935,8 @@
         </p:nvSpPr>
         <p:spPr>
           <a:xfrm>
-            <a:off x="777240" y="4224528"/>
-            <a:ext cx="3108960" cy="411480"/>
+            <a:off x="685800" y="3739896"/>
+            <a:ext cx="1901952" cy="91440"/>
           </a:xfrm>
           <a:prstGeom prst="rect">
             <a:avLst/>
@@ -3644,8 +3973,8 @@
         </p:nvSpPr>
         <p:spPr>
           <a:xfrm>
-            <a:off x="4434840" y="3566160"/>
-            <a:ext cx="3474720" cy="1234440"/>
+            <a:off x="2990088" y="3081528"/>
+            <a:ext cx="2267712" cy="914400"/>
           </a:xfrm>
           <a:prstGeom prst="roundRect">
             <a:avLst/>
@@ -3669,8 +3998,8 @@
         </p:nvSpPr>
         <p:spPr>
           <a:xfrm>
-            <a:off x="4617720" y="3749040"/>
-            <a:ext cx="3108960" cy="274320"/>
+            <a:off x="3172968" y="3264408"/>
+            <a:ext cx="1901952" cy="274320"/>
           </a:xfrm>
           <a:prstGeom prst="rect">
             <a:avLst/>
@@ -3705,8 +4034,8 @@
         </p:nvSpPr>
         <p:spPr>
           <a:xfrm>
-            <a:off x="4617720" y="4224528"/>
-            <a:ext cx="3108960" cy="411480"/>
+            <a:off x="3172968" y="3739896"/>
+            <a:ext cx="1901952" cy="91440"/>
           </a:xfrm>
           <a:prstGeom prst="rect">
             <a:avLst/>
@@ -3743,8 +4072,8 @@
         </p:nvSpPr>
         <p:spPr>
           <a:xfrm>
-            <a:off x="8275320" y="3566160"/>
-            <a:ext cx="3474720" cy="1234440"/>
+            <a:off x="5477256" y="3081528"/>
+            <a:ext cx="2267712" cy="914400"/>
           </a:xfrm>
           <a:prstGeom prst="roundRect">
             <a:avLst/>
@@ -3768,8 +4097,8 @@
         </p:nvSpPr>
         <p:spPr>
           <a:xfrm>
-            <a:off x="8458200" y="3749040"/>
-            <a:ext cx="3108960" cy="274320"/>
+            <a:off x="5660136" y="3264408"/>
+            <a:ext cx="1901952" cy="274320"/>
           </a:xfrm>
           <a:prstGeom prst="rect">
             <a:avLst/>
@@ -3804,8 +4133,8 @@
         </p:nvSpPr>
         <p:spPr>
           <a:xfrm>
-            <a:off x="8458200" y="4224528"/>
-            <a:ext cx="3108960" cy="411480"/>
+            <a:off x="5660136" y="3739896"/>
+            <a:ext cx="1901952" cy="91440"/>
           </a:xfrm>
           <a:prstGeom prst="rect">
             <a:avLst/>
@@ -3836,14 +4165,149 @@
       </p:sp>
       <p:sp>
         <p:nvSpPr>
-          <p:cNvPr id="23" name="Text 21"/>
-          <p:cNvSpPr/>
-          <p:nvPr/>
-        </p:nvSpPr>
-        <p:spPr>
-          <a:xfrm>
-            <a:off x="914400" y="5349240"/>
-            <a:ext cx="10241280" cy="411480"/>
+          <p:cNvPr id="23" name="Shape 21"/>
+          <p:cNvSpPr/>
+          <p:nvPr/>
+        </p:nvSpPr>
+        <p:spPr>
+          <a:xfrm>
+            <a:off x="8119872" y="1947672"/>
+            <a:ext cx="3493008" cy="3127248"/>
+          </a:xfrm>
+          <a:prstGeom prst="roundRect">
+            <a:avLst/>
+          </a:prstGeom>
+          <a:solidFill>
+            <a:srgbClr val="FFFFFF"/>
+          </a:solidFill>
+          <a:ln w="25400">
+            <a:solidFill>
+              <a:srgbClr val="0B65C2"/>
+            </a:solidFill>
+            <a:prstDash val="solid"/>
+          </a:ln>
+        </p:spPr>
+      </p:sp>
+      <p:sp>
+        <p:nvSpPr>
+          <p:cNvPr id="24" name="Text 22"/>
+          <p:cNvSpPr/>
+          <p:nvPr/>
+        </p:nvSpPr>
+        <p:spPr>
+          <a:xfrm>
+            <a:off x="8366760" y="2212848"/>
+            <a:ext cx="2926080" cy="274320"/>
+          </a:xfrm>
+          <a:prstGeom prst="rect">
+            <a:avLst/>
+          </a:prstGeom>
+          <a:noFill/>
+          <a:ln/>
+        </p:spPr>
+        <p:txBody>
+          <a:bodyPr wrap="square" lIns="0" tIns="0" rIns="0" bIns="0" rtlCol="0" anchor="ctr"/>
+          <a:lstStyle/>
+          <a:p>
+            <a:pPr indent="0" marL="0">
+              <a:buNone/>
+            </a:pPr>
+            <a:r>
+              <a:rPr lang="en-US" sz="1300" b="1" dirty="0">
+                <a:solidFill>
+                  <a:srgbClr val="0B65C2"/>
+                </a:solidFill>
+              </a:rPr>
+              <a:t>EXEMPLO NO CENÁRIO</a:t>
+            </a:r>
+            <a:endParaRPr lang="en-US" sz="1300" dirty="0"/>
+          </a:p>
+        </p:txBody>
+      </p:sp>
+      <p:sp>
+        <p:nvSpPr>
+          <p:cNvPr id="25" name="Text 23"/>
+          <p:cNvSpPr/>
+          <p:nvPr/>
+        </p:nvSpPr>
+        <p:spPr>
+          <a:xfrm>
+            <a:off x="8366760" y="2670048"/>
+            <a:ext cx="2971800" cy="1371600"/>
+          </a:xfrm>
+          <a:prstGeom prst="rect">
+            <a:avLst/>
+          </a:prstGeom>
+          <a:noFill/>
+          <a:ln/>
+        </p:spPr>
+        <p:txBody>
+          <a:bodyPr wrap="square" lIns="0" tIns="0" rIns="0" bIns="0" rtlCol="0" anchor="ctr">
+            <a:normAutofit/>
+          </a:bodyPr>
+          <a:lstStyle/>
+          <a:p>
+            <a:pPr indent="0" marL="0">
+              <a:buNone/>
+            </a:pPr>
+            <a:r>
+              <a:rPr lang="en-US" sz="1650" b="1" dirty="0">
+                <a:solidFill>
+                  <a:srgbClr val="12304A"/>
+                </a:solidFill>
+              </a:rPr>
+              <a:t>Se alguém reutiliza a conta compartilhada svc_support para atravessar a VPN, pode agir como fornecedor e alterar arquivos sem atribuição individual.</a:t>
+            </a:r>
+            <a:endParaRPr lang="en-US" sz="1650" dirty="0"/>
+          </a:p>
+        </p:txBody>
+      </p:sp>
+      <p:sp>
+        <p:nvSpPr>
+          <p:cNvPr id="26" name="Text 24"/>
+          <p:cNvSpPr/>
+          <p:nvPr/>
+        </p:nvSpPr>
+        <p:spPr>
+          <a:xfrm>
+            <a:off x="8366760" y="4297680"/>
+            <a:ext cx="2971800" cy="530352"/>
+          </a:xfrm>
+          <a:prstGeom prst="rect">
+            <a:avLst/>
+          </a:prstGeom>
+          <a:noFill/>
+          <a:ln/>
+        </p:spPr>
+        <p:txBody>
+          <a:bodyPr wrap="square" lIns="0" tIns="0" rIns="0" bIns="0" rtlCol="0" anchor="ctr"/>
+          <a:lstStyle/>
+          <a:p>
+            <a:pPr indent="0" marL="0">
+              <a:buNone/>
+            </a:pPr>
+            <a:r>
+              <a:rPr lang="en-US" sz="1400" dirty="0">
+                <a:solidFill>
+                  <a:srgbClr val="4B5E71"/>
+                </a:solidFill>
+              </a:rPr>
+              <a:t>Validar com: origem, MFA, dono da conta e trilha de auditoria.</a:t>
+            </a:r>
+            <a:endParaRPr lang="en-US" sz="1400" dirty="0"/>
+          </a:p>
+        </p:txBody>
+      </p:sp>
+      <p:sp>
+        <p:nvSpPr>
+          <p:cNvPr id="27" name="Text 25"/>
+          <p:cNvSpPr/>
+          <p:nvPr/>
+        </p:nvSpPr>
+        <p:spPr>
+          <a:xfrm>
+            <a:off x="640080" y="5230368"/>
+            <a:ext cx="7132320" cy="384048"/>
           </a:xfrm>
           <a:prstGeom prst="rect">
             <a:avLst/>
@@ -3859,20 +4323,20 @@
               <a:buNone/>
             </a:pPr>
             <a:r>
-              <a:rPr lang="en-US" sz="2100" b="1" dirty="0">
+              <a:rPr lang="en-US" sz="1800" b="1" dirty="0">
                 <a:solidFill>
                   <a:srgbClr val="12304A"/>
                 </a:solidFill>
               </a:rPr>
-              <a:t>Agente + condição + elemento + consequência + evidência</a:t>
-            </a:r>
-            <a:endParaRPr lang="en-US" sz="2100" dirty="0"/>
-          </a:p>
-        </p:txBody>
-      </p:sp>
-      <p:sp>
-        <p:nvSpPr>
-          <p:cNvPr id="24" name="Shape 22"/>
+              <a:t>agente + condição + elemento + consequência + evidência</a:t>
+            </a:r>
+            <a:endParaRPr lang="en-US" sz="1800" dirty="0"/>
+          </a:p>
+        </p:txBody>
+      </p:sp>
+      <p:sp>
+        <p:nvSpPr>
+          <p:cNvPr id="28" name="Shape 26"/>
           <p:cNvSpPr/>
           <p:nvPr/>
         </p:nvSpPr>
@@ -3895,7 +4359,7 @@
       </p:sp>
       <p:sp>
         <p:nvSpPr>
-          <p:cNvPr id="25" name="Text 23"/>
+          <p:cNvPr id="29" name="Text 27"/>
           <p:cNvSpPr/>
           <p:nvPr/>
         </p:nvSpPr>
@@ -3931,7 +4395,7 @@
       </p:sp>
       <p:sp>
         <p:nvSpPr>
-          <p:cNvPr id="26" name="Text 24"/>
+          <p:cNvPr id="30" name="Text 28"/>
           <p:cNvSpPr/>
           <p:nvPr/>
         </p:nvSpPr>
@@ -4065,7 +4529,7 @@
                   <a:srgbClr val="12304A"/>
                 </a:solidFill>
               </a:rPr>
-              <a:t>Ferramentas diferentes respondem perguntas diferentes</a:t>
+              <a:t>Amplie a pergunta sem perder o cenário</a:t>
             </a:r>
             <a:endParaRPr lang="en-US" sz="3000" dirty="0"/>
           </a:p>
@@ -4103,7 +4567,7 @@
                   <a:srgbClr val="4B5E71"/>
                 </a:solidFill>
               </a:rPr>
-              <a:t>Não converta tudo em uma única linha do tempo.</a:t>
+              <a:t>Cada referência entra quando precisamos explicar uma parte diferente do caminho.</a:t>
             </a:r>
             <a:endParaRPr lang="en-US" sz="1700" dirty="0"/>
           </a:p>
@@ -4117,8 +4581,8 @@
         </p:nvSpPr>
         <p:spPr>
           <a:xfrm>
-            <a:off x="640080" y="2148840"/>
-            <a:ext cx="2587752" cy="2788920"/>
+            <a:off x="502920" y="1965960"/>
+            <a:ext cx="2633472" cy="2176272"/>
           </a:xfrm>
           <a:prstGeom prst="roundRect">
             <a:avLst/>
@@ -4142,8 +4606,8 @@
         </p:nvSpPr>
         <p:spPr>
           <a:xfrm>
-            <a:off x="822960" y="2331720"/>
-            <a:ext cx="2221992" cy="274320"/>
+            <a:off x="685800" y="2148840"/>
+            <a:ext cx="2267712" cy="274320"/>
           </a:xfrm>
           <a:prstGeom prst="rect">
             <a:avLst/>
@@ -4178,8 +4642,8 @@
         </p:nvSpPr>
         <p:spPr>
           <a:xfrm>
-            <a:off x="822960" y="2807208"/>
-            <a:ext cx="2221992" cy="1965960"/>
+            <a:off x="685800" y="2624328"/>
+            <a:ext cx="2267712" cy="1353312"/>
           </a:xfrm>
           <a:prstGeom prst="rect">
             <a:avLst/>
@@ -4202,10 +4666,24 @@
                   <a:srgbClr val="172B4D"/>
                 </a:solidFill>
               </a:rPr>
-              <a:t>Que classe de ameaça devo perguntar?</a:t>
+              <a:t>Gerar perguntas</a:t>
             </a:r>
             <a:endParaRPr lang="en-US" sz="1700" dirty="0"/>
           </a:p>
+          <a:p>
+            <a:pPr indent="0" marL="0">
+              <a:buNone/>
+            </a:pPr>
+            <a:r>
+              <a:rPr lang="en-US" sz="1700" b="1" dirty="0">
+                <a:solidFill>
+                  <a:srgbClr val="172B4D"/>
+                </a:solidFill>
+              </a:rPr>
+              <a:t>"que classe de ameaça?"</a:t>
+            </a:r>
+            <a:endParaRPr lang="en-US" sz="1700" dirty="0"/>
+          </a:p>
         </p:txBody>
       </p:sp>
       <p:sp>
@@ -4216,8 +4694,8 @@
         </p:nvSpPr>
         <p:spPr>
           <a:xfrm>
-            <a:off x="3502152" y="2148840"/>
-            <a:ext cx="2587752" cy="2788920"/>
+            <a:off x="3392424" y="1965960"/>
+            <a:ext cx="2633472" cy="2176272"/>
           </a:xfrm>
           <a:prstGeom prst="roundRect">
             <a:avLst/>
@@ -4241,8 +4719,8 @@
         </p:nvSpPr>
         <p:spPr>
           <a:xfrm>
-            <a:off x="3685032" y="2331720"/>
-            <a:ext cx="2221992" cy="274320"/>
+            <a:off x="3575304" y="2148840"/>
+            <a:ext cx="2267712" cy="274320"/>
           </a:xfrm>
           <a:prstGeom prst="rect">
             <a:avLst/>
@@ -4277,8 +4755,8 @@
         </p:nvSpPr>
         <p:spPr>
           <a:xfrm>
-            <a:off x="3685032" y="2807208"/>
-            <a:ext cx="2221992" cy="1965960"/>
+            <a:off x="3575304" y="2624328"/>
+            <a:ext cx="2267712" cy="1353312"/>
           </a:xfrm>
           <a:prstGeom prst="rect">
             <a:avLst/>
@@ -4301,10 +4779,24 @@
                   <a:srgbClr val="172B4D"/>
                 </a:solidFill>
               </a:rPr>
-              <a:t>Que padrão e pré-condições explicam o abuso?</a:t>
+              <a:t>Explicar o padrão</a:t>
             </a:r>
             <a:endParaRPr lang="en-US" sz="1700" dirty="0"/>
           </a:p>
+          <a:p>
+            <a:pPr indent="0" marL="0">
+              <a:buNone/>
+            </a:pPr>
+            <a:r>
+              <a:rPr lang="en-US" sz="1700" b="1" dirty="0">
+                <a:solidFill>
+                  <a:srgbClr val="172B4D"/>
+                </a:solidFill>
+              </a:rPr>
+              <a:t>"quais pré-condições?"</a:t>
+            </a:r>
+            <a:endParaRPr lang="en-US" sz="1700" dirty="0"/>
+          </a:p>
         </p:txBody>
       </p:sp>
       <p:sp>
@@ -4315,8 +4807,8 @@
         </p:nvSpPr>
         <p:spPr>
           <a:xfrm>
-            <a:off x="6364224" y="2148840"/>
-            <a:ext cx="2587752" cy="2788920"/>
+            <a:off x="6281928" y="1965960"/>
+            <a:ext cx="2633472" cy="2176272"/>
           </a:xfrm>
           <a:prstGeom prst="roundRect">
             <a:avLst/>
@@ -4340,8 +4832,8 @@
         </p:nvSpPr>
         <p:spPr>
           <a:xfrm>
-            <a:off x="6547104" y="2331720"/>
-            <a:ext cx="2221992" cy="274320"/>
+            <a:off x="6464808" y="2148840"/>
+            <a:ext cx="2267712" cy="274320"/>
           </a:xfrm>
           <a:prstGeom prst="rect">
             <a:avLst/>
@@ -4376,8 +4868,8 @@
         </p:nvSpPr>
         <p:spPr>
           <a:xfrm>
-            <a:off x="6547104" y="2807208"/>
-            <a:ext cx="2221992" cy="1965960"/>
+            <a:off x="6464808" y="2624328"/>
+            <a:ext cx="2267712" cy="1353312"/>
           </a:xfrm>
           <a:prstGeom prst="rect">
             <a:avLst/>
@@ -4400,10 +4892,24 @@
                   <a:srgbClr val="172B4D"/>
                 </a:solidFill>
               </a:rPr>
-              <a:t>Que comportamento, objetivo e telemetria observar?</a:t>
+              <a:t>Buscar comportamento</a:t>
             </a:r>
             <a:endParaRPr lang="en-US" sz="1700" dirty="0"/>
           </a:p>
+          <a:p>
+            <a:pPr indent="0" marL="0">
+              <a:buNone/>
+            </a:pPr>
+            <a:r>
+              <a:rPr lang="en-US" sz="1700" b="1" dirty="0">
+                <a:solidFill>
+                  <a:srgbClr val="172B4D"/>
+                </a:solidFill>
+              </a:rPr>
+              <a:t>"que telemetria observar?"</a:t>
+            </a:r>
+            <a:endParaRPr lang="en-US" sz="1700" dirty="0"/>
+          </a:p>
         </p:txBody>
       </p:sp>
       <p:sp>
@@ -4414,8 +4920,8 @@
         </p:nvSpPr>
         <p:spPr>
           <a:xfrm>
-            <a:off x="9226296" y="2148840"/>
-            <a:ext cx="2587752" cy="2788920"/>
+            <a:off x="9171432" y="1965960"/>
+            <a:ext cx="2633472" cy="2176272"/>
           </a:xfrm>
           <a:prstGeom prst="roundRect">
             <a:avLst/>
@@ -4439,8 +4945,8 @@
         </p:nvSpPr>
         <p:spPr>
           <a:xfrm>
-            <a:off x="9409176" y="2331720"/>
-            <a:ext cx="2221992" cy="274320"/>
+            <a:off x="9354312" y="2148840"/>
+            <a:ext cx="2267712" cy="274320"/>
           </a:xfrm>
           <a:prstGeom prst="rect">
             <a:avLst/>
@@ -4475,8 +4981,8 @@
         </p:nvSpPr>
         <p:spPr>
           <a:xfrm>
-            <a:off x="9409176" y="2807208"/>
-            <a:ext cx="2221992" cy="1965960"/>
+            <a:off x="9354312" y="2624328"/>
+            <a:ext cx="2267712" cy="1353312"/>
           </a:xfrm>
           <a:prstGeom prst="rect">
             <a:avLst/>
@@ -4499,10 +5005,24 @@
                   <a:srgbClr val="172B4D"/>
                 </a:solidFill>
               </a:rPr>
-              <a:t>Como comunicar progressão e interrupção?</a:t>
+              <a:t>Comunicar progressão</a:t>
             </a:r>
             <a:endParaRPr lang="en-US" sz="1700" dirty="0"/>
           </a:p>
+          <a:p>
+            <a:pPr indent="0" marL="0">
+              <a:buNone/>
+            </a:pPr>
+            <a:r>
+              <a:rPr lang="en-US" sz="1700" b="1" dirty="0">
+                <a:solidFill>
+                  <a:srgbClr val="172B4D"/>
+                </a:solidFill>
+              </a:rPr>
+              <a:t>"onde interromper?"</a:t>
+            </a:r>
+            <a:endParaRPr lang="en-US" sz="1700" dirty="0"/>
+          </a:p>
         </p:txBody>
       </p:sp>
       <p:sp>
@@ -4513,13 +5033,15 @@
         </p:nvSpPr>
         <p:spPr>
           <a:xfrm>
-            <a:off x="548640" y="6473952"/>
-            <a:ext cx="11018520" cy="0"/>
-          </a:xfrm>
-          <a:prstGeom prst="line">
-            <a:avLst/>
-          </a:prstGeom>
-          <a:noFill/>
+            <a:off x="731520" y="4590288"/>
+            <a:ext cx="10744200" cy="932688"/>
+          </a:xfrm>
+          <a:prstGeom prst="roundRect">
+            <a:avLst/>
+          </a:prstGeom>
+          <a:solidFill>
+            <a:srgbClr val="EEF3F7"/>
+          </a:solidFill>
           <a:ln w="12700">
             <a:solidFill>
               <a:srgbClr val="C9D4DF"/>
@@ -4536,6 +5058,65 @@
         </p:nvSpPr>
         <p:spPr>
           <a:xfrm>
+            <a:off x="960120" y="4855464"/>
+            <a:ext cx="10287000" cy="384048"/>
+          </a:xfrm>
+          <a:prstGeom prst="rect">
+            <a:avLst/>
+          </a:prstGeom>
+          <a:noFill/>
+          <a:ln/>
+        </p:spPr>
+        <p:txBody>
+          <a:bodyPr wrap="square" lIns="0" tIns="0" rIns="0" bIns="0" rtlCol="0" anchor="ctr"/>
+          <a:lstStyle/>
+          <a:p>
+            <a:pPr algn="ctr" indent="0" marL="0">
+              <a:buNone/>
+            </a:pPr>
+            <a:r>
+              <a:rPr lang="en-US" sz="1750" b="1" dirty="0">
+                <a:solidFill>
+                  <a:srgbClr val="12304A"/>
+                </a:solidFill>
+              </a:rPr>
+              <a:t>No nosso caso: STRIDE formula a ameaça → CAPEC ajuda a questionar o abuso → ATT&amp;CK orienta evidências → risco decide o tratamento.</a:t>
+            </a:r>
+            <a:endParaRPr lang="en-US" sz="1750" dirty="0"/>
+          </a:p>
+        </p:txBody>
+      </p:sp>
+      <p:sp>
+        <p:nvSpPr>
+          <p:cNvPr id="19" name="Shape 17"/>
+          <p:cNvSpPr/>
+          <p:nvPr/>
+        </p:nvSpPr>
+        <p:spPr>
+          <a:xfrm>
+            <a:off x="548640" y="6473952"/>
+            <a:ext cx="11018520" cy="0"/>
+          </a:xfrm>
+          <a:prstGeom prst="line">
+            <a:avLst/>
+          </a:prstGeom>
+          <a:noFill/>
+          <a:ln w="12700">
+            <a:solidFill>
+              <a:srgbClr val="C9D4DF"/>
+            </a:solidFill>
+            <a:prstDash val="solid"/>
+          </a:ln>
+        </p:spPr>
+      </p:sp>
+      <p:sp>
+        <p:nvSpPr>
+          <p:cNvPr id="20" name="Text 18"/>
+          <p:cNvSpPr/>
+          <p:nvPr/>
+        </p:nvSpPr>
+        <p:spPr>
+          <a:xfrm>
             <a:off x="594360" y="6528816"/>
             <a:ext cx="3657600" cy="182880"/>
           </a:xfrm>
@@ -4566,7 +5147,7 @@
       </p:sp>
       <p:sp>
         <p:nvSpPr>
-          <p:cNvPr id="19" name="Text 17"/>
+          <p:cNvPr id="21" name="Text 19"/>
           <p:cNvSpPr/>
           <p:nvPr/>
         </p:nvSpPr>
@@ -4640,8 +5221,8 @@
         </p:nvSpPr>
         <p:spPr>
           <a:xfrm>
-            <a:off x="731520" y="640080"/>
-            <a:ext cx="3657600" cy="274320"/>
+            <a:off x="731520" y="585216"/>
+            <a:ext cx="4114800" cy="274320"/>
           </a:xfrm>
           <a:prstGeom prst="rect">
             <a:avLst/>
@@ -4662,7 +5243,7 @@
                   <a:srgbClr val="7DE0D8"/>
                 </a:solidFill>
               </a:rPr>
-              <a:t>CHECKPOINT 2</a:t>
+              <a:t>DECISÃO DE TRATAMENTO</a:t>
             </a:r>
             <a:endParaRPr lang="en-US" sz="1400" dirty="0"/>
           </a:p>
@@ -4676,44 +5257,80 @@
         </p:nvSpPr>
         <p:spPr>
           <a:xfrm>
-            <a:off x="731520" y="1325880"/>
-            <a:ext cx="10058400" cy="822960"/>
-          </a:xfrm>
-          <a:prstGeom prst="rect">
-            <a:avLst/>
-          </a:prstGeom>
-          <a:noFill/>
-          <a:ln/>
-        </p:spPr>
-        <p:txBody>
-          <a:bodyPr wrap="square" lIns="0" tIns="0" rIns="0" bIns="0" rtlCol="0" anchor="ctr"/>
-          <a:lstStyle/>
-          <a:p>
-            <a:pPr indent="0" marL="0">
-              <a:buNone/>
-            </a:pPr>
-            <a:r>
-              <a:rPr lang="en-US" sz="3700" b="1" dirty="0">
+            <a:off x="731520" y="1097280"/>
+            <a:ext cx="10424160" cy="658368"/>
+          </a:xfrm>
+          <a:prstGeom prst="rect">
+            <a:avLst/>
+          </a:prstGeom>
+          <a:noFill/>
+          <a:ln/>
+        </p:spPr>
+        <p:txBody>
+          <a:bodyPr wrap="square" lIns="0" tIns="0" rIns="0" bIns="0" rtlCol="0" anchor="ctr"/>
+          <a:lstStyle/>
+          <a:p>
+            <a:pPr indent="0" marL="0">
+              <a:buNone/>
+            </a:pPr>
+            <a:r>
+              <a:rPr lang="en-US" sz="3400" b="1" dirty="0">
                 <a:solidFill>
                   <a:srgbClr val="FFFFFF"/>
                 </a:solidFill>
               </a:rPr>
-              <a:t>Onde você interromperia o caminho?</a:t>
-            </a:r>
-            <a:endParaRPr lang="en-US" sz="3700" dirty="0"/>
-          </a:p>
-        </p:txBody>
-      </p:sp>
-      <p:sp>
-        <p:nvSpPr>
-          <p:cNvPr id="4" name="Shape 2"/>
-          <p:cNvSpPr/>
-          <p:nvPr/>
-        </p:nvSpPr>
-        <p:spPr>
-          <a:xfrm>
-            <a:off x="731520" y="2743200"/>
-            <a:ext cx="3246120" cy="1828800"/>
+              <a:t>Onde interromper sem parar a operação?</a:t>
+            </a:r>
+            <a:endParaRPr lang="en-US" sz="3400" dirty="0"/>
+          </a:p>
+        </p:txBody>
+      </p:sp>
+      <p:sp>
+        <p:nvSpPr>
+          <p:cNvPr id="4" name="Text 2"/>
+          <p:cNvSpPr/>
+          <p:nvPr/>
+        </p:nvSpPr>
+        <p:spPr>
+          <a:xfrm>
+            <a:off x="749808" y="1901952"/>
+            <a:ext cx="10332720" cy="603504"/>
+          </a:xfrm>
+          <a:prstGeom prst="rect">
+            <a:avLst/>
+          </a:prstGeom>
+          <a:noFill/>
+          <a:ln/>
+        </p:spPr>
+        <p:txBody>
+          <a:bodyPr wrap="square" lIns="0" tIns="0" rIns="0" bIns="0" rtlCol="0" anchor="ctr"/>
+          <a:lstStyle/>
+          <a:p>
+            <a:pPr indent="0" marL="0">
+              <a:buNone/>
+            </a:pPr>
+            <a:r>
+              <a:rPr lang="en-US" sz="1800" dirty="0">
+                <a:solidFill>
+                  <a:srgbClr val="D6E5F0"/>
+                </a:solidFill>
+              </a:rPr>
+              <a:t>O mesmo caminho admite controles em camadas — e cada escolha protege algo enquanto pode limitar uma operação legítima.</a:t>
+            </a:r>
+            <a:endParaRPr lang="en-US" sz="1800" dirty="0"/>
+          </a:p>
+        </p:txBody>
+      </p:sp>
+      <p:sp>
+        <p:nvSpPr>
+          <p:cNvPr id="5" name="Shape 3"/>
+          <p:cNvSpPr/>
+          <p:nvPr/>
+        </p:nvSpPr>
+        <p:spPr>
+          <a:xfrm>
+            <a:off x="640080" y="2788920"/>
+            <a:ext cx="3401568" cy="2240280"/>
           </a:xfrm>
           <a:prstGeom prst="roundRect">
             <a:avLst/>
@@ -4731,14 +5348,14 @@
       </p:sp>
       <p:sp>
         <p:nvSpPr>
-          <p:cNvPr id="5" name="Text 3"/>
-          <p:cNvSpPr/>
-          <p:nvPr/>
-        </p:nvSpPr>
-        <p:spPr>
-          <a:xfrm>
-            <a:off x="960120" y="3063240"/>
-            <a:ext cx="2788920" cy="320040"/>
+          <p:cNvPr id="6" name="Text 4"/>
+          <p:cNvSpPr/>
+          <p:nvPr/>
+        </p:nvSpPr>
+        <p:spPr>
+          <a:xfrm>
+            <a:off x="868680" y="3054096"/>
+            <a:ext cx="2944368" cy="274320"/>
           </a:xfrm>
           <a:prstGeom prst="rect">
             <a:avLst/>
@@ -4754,12 +5371,48 @@
               <a:buNone/>
             </a:pPr>
             <a:r>
+              <a:rPr lang="en-US" sz="1500" b="1" dirty="0">
+                <a:solidFill>
+                  <a:srgbClr val="7DE0D8"/>
+                </a:solidFill>
+              </a:rPr>
+              <a:t>IDENTIDADE</a:t>
+            </a:r>
+            <a:endParaRPr lang="en-US" sz="1500" dirty="0"/>
+          </a:p>
+        </p:txBody>
+      </p:sp>
+      <p:sp>
+        <p:nvSpPr>
+          <p:cNvPr id="7" name="Text 5"/>
+          <p:cNvSpPr/>
+          <p:nvPr/>
+        </p:nvSpPr>
+        <p:spPr>
+          <a:xfrm>
+            <a:off x="896112" y="3493008"/>
+            <a:ext cx="2889504" cy="411480"/>
+          </a:xfrm>
+          <a:prstGeom prst="rect">
+            <a:avLst/>
+          </a:prstGeom>
+          <a:noFill/>
+          <a:ln/>
+        </p:spPr>
+        <p:txBody>
+          <a:bodyPr wrap="square" lIns="0" tIns="0" rIns="0" bIns="0" rtlCol="0" anchor="ctr"/>
+          <a:lstStyle/>
+          <a:p>
+            <a:pPr algn="ctr" indent="0" marL="0">
+              <a:buNone/>
+            </a:pPr>
+            <a:r>
               <a:rPr lang="en-US" sz="1700" b="1" dirty="0">
                 <a:solidFill>
                   <a:srgbClr val="FFFFFF"/>
                 </a:solidFill>
               </a:rPr>
-              <a:t>IDENTIDADE</a:t>
+              <a:t>MFA + conta individual</a:t>
             </a:r>
             <a:endParaRPr lang="en-US" sz="1700" dirty="0"/>
           </a:p>
@@ -4767,14 +5420,14 @@
       </p:sp>
       <p:sp>
         <p:nvSpPr>
-          <p:cNvPr id="6" name="Text 4"/>
-          <p:cNvSpPr/>
-          <p:nvPr/>
-        </p:nvSpPr>
-        <p:spPr>
-          <a:xfrm>
-            <a:off x="1005840" y="3657600"/>
-            <a:ext cx="2697480" cy="502920"/>
+          <p:cNvPr id="8" name="Text 6"/>
+          <p:cNvSpPr/>
+          <p:nvPr/>
+        </p:nvSpPr>
+        <p:spPr>
+          <a:xfrm>
+            <a:off x="914400" y="4160520"/>
+            <a:ext cx="2852928" cy="566928"/>
           </a:xfrm>
           <a:prstGeom prst="rect">
             <a:avLst/>
@@ -4790,27 +5443,41 @@
               <a:buNone/>
             </a:pPr>
             <a:r>
-              <a:rPr lang="en-US" sz="1700" dirty="0">
+              <a:rPr lang="en-US" sz="1350" dirty="0">
                 <a:solidFill>
                   <a:srgbClr val="FFFFFF"/>
                 </a:solidFill>
               </a:rPr>
-              <a:t>MFA + conta individual</a:t>
-            </a:r>
-            <a:endParaRPr lang="en-US" sz="1700" dirty="0"/>
-          </a:p>
-        </p:txBody>
-      </p:sp>
-      <p:sp>
-        <p:nvSpPr>
-          <p:cNvPr id="7" name="Shape 5"/>
-          <p:cNvSpPr/>
-          <p:nvPr/>
-        </p:nvSpPr>
-        <p:spPr>
-          <a:xfrm>
-            <a:off x="4434840" y="2743200"/>
-            <a:ext cx="3246120" cy="1828800"/>
+              <a:t>reduz personificação</a:t>
+            </a:r>
+            <a:endParaRPr lang="en-US" sz="1350" dirty="0"/>
+          </a:p>
+          <a:p>
+            <a:pPr algn="ctr" indent="0" marL="0">
+              <a:buNone/>
+            </a:pPr>
+            <a:r>
+              <a:rPr lang="en-US" sz="1350" dirty="0">
+                <a:solidFill>
+                  <a:srgbClr val="FFFFFF"/>
+                </a:solidFill>
+              </a:rPr>
+              <a:t>⚠ pode atrasar suporte</a:t>
+            </a:r>
+            <a:endParaRPr lang="en-US" sz="1350" dirty="0"/>
+          </a:p>
+        </p:txBody>
+      </p:sp>
+      <p:sp>
+        <p:nvSpPr>
+          <p:cNvPr id="9" name="Shape 7"/>
+          <p:cNvSpPr/>
+          <p:nvPr/>
+        </p:nvSpPr>
+        <p:spPr>
+          <a:xfrm>
+            <a:off x="4434840" y="2788920"/>
+            <a:ext cx="3401568" cy="2240280"/>
           </a:xfrm>
           <a:prstGeom prst="roundRect">
             <a:avLst/>
@@ -4828,14 +5495,14 @@
       </p:sp>
       <p:sp>
         <p:nvSpPr>
-          <p:cNvPr id="8" name="Text 6"/>
-          <p:cNvSpPr/>
-          <p:nvPr/>
-        </p:nvSpPr>
-        <p:spPr>
-          <a:xfrm>
-            <a:off x="4663440" y="3063240"/>
-            <a:ext cx="2788920" cy="320040"/>
+          <p:cNvPr id="10" name="Text 8"/>
+          <p:cNvSpPr/>
+          <p:nvPr/>
+        </p:nvSpPr>
+        <p:spPr>
+          <a:xfrm>
+            <a:off x="4663440" y="3054096"/>
+            <a:ext cx="2944368" cy="274320"/>
           </a:xfrm>
           <a:prstGeom prst="rect">
             <a:avLst/>
@@ -4851,12 +5518,48 @@
               <a:buNone/>
             </a:pPr>
             <a:r>
+              <a:rPr lang="en-US" sz="1500" b="1" dirty="0">
+                <a:solidFill>
+                  <a:srgbClr val="7DE0D8"/>
+                </a:solidFill>
+              </a:rPr>
+              <a:t>TRAVESSIA</a:t>
+            </a:r>
+            <a:endParaRPr lang="en-US" sz="1500" dirty="0"/>
+          </a:p>
+        </p:txBody>
+      </p:sp>
+      <p:sp>
+        <p:nvSpPr>
+          <p:cNvPr id="11" name="Text 9"/>
+          <p:cNvSpPr/>
+          <p:nvPr/>
+        </p:nvSpPr>
+        <p:spPr>
+          <a:xfrm>
+            <a:off x="4690872" y="3493008"/>
+            <a:ext cx="2889504" cy="411480"/>
+          </a:xfrm>
+          <a:prstGeom prst="rect">
+            <a:avLst/>
+          </a:prstGeom>
+          <a:noFill/>
+          <a:ln/>
+        </p:spPr>
+        <p:txBody>
+          <a:bodyPr wrap="square" lIns="0" tIns="0" rIns="0" bIns="0" rtlCol="0" anchor="ctr"/>
+          <a:lstStyle/>
+          <a:p>
+            <a:pPr algn="ctr" indent="0" marL="0">
+              <a:buNone/>
+            </a:pPr>
+            <a:r>
               <a:rPr lang="en-US" sz="1700" b="1" dirty="0">
                 <a:solidFill>
                   <a:srgbClr val="FFFFFF"/>
                 </a:solidFill>
               </a:rPr>
-              <a:t>TRAVESSIA</a:t>
+              <a:t>jump host + fluxo permitido</a:t>
             </a:r>
             <a:endParaRPr lang="en-US" sz="1700" dirty="0"/>
           </a:p>
@@ -4864,14 +5567,14 @@
       </p:sp>
       <p:sp>
         <p:nvSpPr>
-          <p:cNvPr id="9" name="Text 7"/>
-          <p:cNvSpPr/>
-          <p:nvPr/>
-        </p:nvSpPr>
-        <p:spPr>
-          <a:xfrm>
-            <a:off x="4709160" y="3657600"/>
-            <a:ext cx="2697480" cy="502920"/>
+          <p:cNvPr id="12" name="Text 10"/>
+          <p:cNvSpPr/>
+          <p:nvPr/>
+        </p:nvSpPr>
+        <p:spPr>
+          <a:xfrm>
+            <a:off x="4709160" y="4160520"/>
+            <a:ext cx="2852928" cy="566928"/>
           </a:xfrm>
           <a:prstGeom prst="rect">
             <a:avLst/>
@@ -4887,27 +5590,41 @@
               <a:buNone/>
             </a:pPr>
             <a:r>
-              <a:rPr lang="en-US" sz="1700" dirty="0">
+              <a:rPr lang="en-US" sz="1350" dirty="0">
                 <a:solidFill>
                   <a:srgbClr val="FFFFFF"/>
                 </a:solidFill>
               </a:rPr>
-              <a:t>jump host + fluxo permitido</a:t>
-            </a:r>
-            <a:endParaRPr lang="en-US" sz="1700" dirty="0"/>
-          </a:p>
-        </p:txBody>
-      </p:sp>
-      <p:sp>
-        <p:nvSpPr>
-          <p:cNvPr id="10" name="Shape 8"/>
-          <p:cNvSpPr/>
-          <p:nvPr/>
-        </p:nvSpPr>
-        <p:spPr>
-          <a:xfrm>
-            <a:off x="8138160" y="2743200"/>
-            <a:ext cx="3246120" cy="1828800"/>
+              <a:t>limita movimento</a:t>
+            </a:r>
+            <a:endParaRPr lang="en-US" sz="1350" dirty="0"/>
+          </a:p>
+          <a:p>
+            <a:pPr algn="ctr" indent="0" marL="0">
+              <a:buNone/>
+            </a:pPr>
+            <a:r>
+              <a:rPr lang="en-US" sz="1350" dirty="0">
+                <a:solidFill>
+                  <a:srgbClr val="FFFFFF"/>
+                </a:solidFill>
+              </a:rPr>
+              <a:t>⚠ exige acesso emergencial</a:t>
+            </a:r>
+            <a:endParaRPr lang="en-US" sz="1350" dirty="0"/>
+          </a:p>
+        </p:txBody>
+      </p:sp>
+      <p:sp>
+        <p:nvSpPr>
+          <p:cNvPr id="13" name="Shape 11"/>
+          <p:cNvSpPr/>
+          <p:nvPr/>
+        </p:nvSpPr>
+        <p:spPr>
+          <a:xfrm>
+            <a:off x="8229600" y="2788920"/>
+            <a:ext cx="3401568" cy="2240280"/>
           </a:xfrm>
           <a:prstGeom prst="roundRect">
             <a:avLst/>
@@ -4925,14 +5642,14 @@
       </p:sp>
       <p:sp>
         <p:nvSpPr>
-          <p:cNvPr id="11" name="Text 9"/>
-          <p:cNvSpPr/>
-          <p:nvPr/>
-        </p:nvSpPr>
-        <p:spPr>
-          <a:xfrm>
-            <a:off x="8366760" y="3063240"/>
-            <a:ext cx="2788920" cy="320040"/>
+          <p:cNvPr id="14" name="Text 12"/>
+          <p:cNvSpPr/>
+          <p:nvPr/>
+        </p:nvSpPr>
+        <p:spPr>
+          <a:xfrm>
+            <a:off x="8458200" y="3054096"/>
+            <a:ext cx="2944368" cy="274320"/>
           </a:xfrm>
           <a:prstGeom prst="rect">
             <a:avLst/>
@@ -4948,12 +5665,48 @@
               <a:buNone/>
             </a:pPr>
             <a:r>
+              <a:rPr lang="en-US" sz="1500" b="1" dirty="0">
+                <a:solidFill>
+                  <a:srgbClr val="7DE0D8"/>
+                </a:solidFill>
+              </a:rPr>
+              <a:t>IMPACTO</a:t>
+            </a:r>
+            <a:endParaRPr lang="en-US" sz="1500" dirty="0"/>
+          </a:p>
+        </p:txBody>
+      </p:sp>
+      <p:sp>
+        <p:nvSpPr>
+          <p:cNvPr id="15" name="Text 13"/>
+          <p:cNvSpPr/>
+          <p:nvPr/>
+        </p:nvSpPr>
+        <p:spPr>
+          <a:xfrm>
+            <a:off x="8485632" y="3493008"/>
+            <a:ext cx="2889504" cy="411480"/>
+          </a:xfrm>
+          <a:prstGeom prst="rect">
+            <a:avLst/>
+          </a:prstGeom>
+          <a:noFill/>
+          <a:ln/>
+        </p:spPr>
+        <p:txBody>
+          <a:bodyPr wrap="square" lIns="0" tIns="0" rIns="0" bIns="0" rtlCol="0" anchor="ctr"/>
+          <a:lstStyle/>
+          <a:p>
+            <a:pPr algn="ctr" indent="0" marL="0">
+              <a:buNone/>
+            </a:pPr>
+            <a:r>
               <a:rPr lang="en-US" sz="1700" b="1" dirty="0">
                 <a:solidFill>
                   <a:srgbClr val="FFFFFF"/>
                 </a:solidFill>
               </a:rPr>
-              <a:t>IMPACTO</a:t>
+              <a:t>backup + restauração testada</a:t>
             </a:r>
             <a:endParaRPr lang="en-US" sz="1700" dirty="0"/>
           </a:p>
@@ -4961,14 +5714,14 @@
       </p:sp>
       <p:sp>
         <p:nvSpPr>
-          <p:cNvPr id="12" name="Text 10"/>
-          <p:cNvSpPr/>
-          <p:nvPr/>
-        </p:nvSpPr>
-        <p:spPr>
-          <a:xfrm>
-            <a:off x="8412480" y="3657600"/>
-            <a:ext cx="2697480" cy="502920"/>
+          <p:cNvPr id="16" name="Text 14"/>
+          <p:cNvSpPr/>
+          <p:nvPr/>
+        </p:nvSpPr>
+        <p:spPr>
+          <a:xfrm>
+            <a:off x="8503920" y="4160520"/>
+            <a:ext cx="2852928" cy="566928"/>
           </a:xfrm>
           <a:prstGeom prst="rect">
             <a:avLst/>
@@ -4984,50 +5737,64 @@
               <a:buNone/>
             </a:pPr>
             <a:r>
+              <a:rPr lang="en-US" sz="1350" dirty="0">
+                <a:solidFill>
+                  <a:srgbClr val="FFFFFF"/>
+                </a:solidFill>
+              </a:rPr>
+              <a:t>reduz consequência</a:t>
+            </a:r>
+            <a:endParaRPr lang="en-US" sz="1350" dirty="0"/>
+          </a:p>
+          <a:p>
+            <a:pPr algn="ctr" indent="0" marL="0">
+              <a:buNone/>
+            </a:pPr>
+            <a:r>
+              <a:rPr lang="en-US" sz="1350" dirty="0">
+                <a:solidFill>
+                  <a:srgbClr val="FFFFFF"/>
+                </a:solidFill>
+              </a:rPr>
+              <a:t>⚠ não impede acesso inicial</a:t>
+            </a:r>
+            <a:endParaRPr lang="en-US" sz="1350" dirty="0"/>
+          </a:p>
+        </p:txBody>
+      </p:sp>
+      <p:sp>
+        <p:nvSpPr>
+          <p:cNvPr id="17" name="Text 15"/>
+          <p:cNvSpPr/>
+          <p:nvPr/>
+        </p:nvSpPr>
+        <p:spPr>
+          <a:xfrm>
+            <a:off x="822960" y="5687568"/>
+            <a:ext cx="10332720" cy="365760"/>
+          </a:xfrm>
+          <a:prstGeom prst="rect">
+            <a:avLst/>
+          </a:prstGeom>
+          <a:noFill/>
+          <a:ln/>
+        </p:spPr>
+        <p:txBody>
+          <a:bodyPr wrap="square" lIns="0" tIns="0" rIns="0" bIns="0" rtlCol="0" anchor="ctr"/>
+          <a:lstStyle/>
+          <a:p>
+            <a:pPr algn="ctr" indent="0" marL="0">
+              <a:buNone/>
+            </a:pPr>
+            <a:r>
               <a:rPr lang="en-US" sz="1700" dirty="0">
                 <a:solidFill>
-                  <a:srgbClr val="FFFFFF"/>
-                </a:solidFill>
-              </a:rPr>
-              <a:t>backup + recuperação testada</a:t>
+                  <a:srgbClr val="D6E5F0"/>
+                </a:solidFill>
+              </a:rPr>
+              <a:t>Decida com premissa, consequência, efeito operacional e evidência de eficácia.</a:t>
             </a:r>
             <a:endParaRPr lang="en-US" sz="1700" dirty="0"/>
-          </a:p>
-        </p:txBody>
-      </p:sp>
-      <p:sp>
-        <p:nvSpPr>
-          <p:cNvPr id="13" name="Text 11"/>
-          <p:cNvSpPr/>
-          <p:nvPr/>
-        </p:nvSpPr>
-        <p:spPr>
-          <a:xfrm>
-            <a:off x="822960" y="5806440"/>
-            <a:ext cx="10332720" cy="365760"/>
-          </a:xfrm>
-          <a:prstGeom prst="rect">
-            <a:avLst/>
-          </a:prstGeom>
-          <a:noFill/>
-          <a:ln/>
-        </p:spPr>
-        <p:txBody>
-          <a:bodyPr wrap="square" lIns="0" tIns="0" rIns="0" bIns="0" rtlCol="0" anchor="ctr"/>
-          <a:lstStyle/>
-          <a:p>
-            <a:pPr algn="ctr" indent="0" marL="0">
-              <a:buNone/>
-            </a:pPr>
-            <a:r>
-              <a:rPr lang="en-US" sz="1800" dirty="0">
-                <a:solidFill>
-                  <a:srgbClr val="D6E5F0"/>
-                </a:solidFill>
-              </a:rPr>
-              <a:t>Declare premissa, efeito operacional e evidência de eficácia.</a:t>
-            </a:r>
-            <a:endParaRPr lang="en-US" sz="1800" dirty="0"/>
           </a:p>
         </p:txBody>
       </p:sp>
@@ -5131,7 +5898,7 @@
                   <a:srgbClr val="12304A"/>
                 </a:solidFill>
               </a:rPr>
-              <a:t>Simule decisões, não malware</a:t>
+              <a:t>Novas informações mudam a decisão</a:t>
             </a:r>
             <a:endParaRPr lang="en-US" sz="3000" dirty="0"/>
           </a:p>
@@ -5169,7 +5936,7 @@
                   <a:srgbClr val="4B5E71"/>
                 </a:solidFill>
               </a:rPr>
-              <a:t>Cartões alteram a informação disponível; o sistema real não é modificado.</a:t>
+              <a:t>Não executaremos malware: os cartões atualizam o modelo e obrigam o grupo a revisar evidência e risco.</a:t>
             </a:r>
             <a:endParaRPr lang="en-US" sz="1700" dirty="0"/>
           </a:p>
@@ -5183,8 +5950,8 @@
         </p:nvSpPr>
         <p:spPr>
           <a:xfrm>
-            <a:off x="393192" y="2240280"/>
-            <a:ext cx="2103120" cy="2331720"/>
+            <a:off x="594360" y="2148840"/>
+            <a:ext cx="3401568" cy="2395728"/>
           </a:xfrm>
           <a:prstGeom prst="roundRect">
             <a:avLst/>
@@ -5192,6 +5959,559 @@
           <a:solidFill>
             <a:srgbClr val="FFFFFF"/>
           </a:solidFill>
+          <a:ln w="25400">
+            <a:solidFill>
+              <a:srgbClr val="0B65C2"/>
+            </a:solidFill>
+            <a:prstDash val="solid"/>
+          </a:ln>
+        </p:spPr>
+      </p:sp>
+      <p:sp>
+        <p:nvSpPr>
+          <p:cNvPr id="6" name="Text 4"/>
+          <p:cNvSpPr/>
+          <p:nvPr/>
+        </p:nvSpPr>
+        <p:spPr>
+          <a:xfrm>
+            <a:off x="822960" y="2395728"/>
+            <a:ext cx="566928" cy="475488"/>
+          </a:xfrm>
+          <a:prstGeom prst="rect">
+            <a:avLst/>
+          </a:prstGeom>
+          <a:solidFill>
+            <a:srgbClr val="0B65C2"/>
+          </a:solidFill>
+          <a:ln/>
+        </p:spPr>
+        <p:txBody>
+          <a:bodyPr wrap="square" lIns="0" tIns="0" rIns="0" bIns="0" rtlCol="0" anchor="ctr"/>
+          <a:lstStyle/>
+          <a:p>
+            <a:pPr algn="ctr" indent="0" marL="0">
+              <a:buNone/>
+            </a:pPr>
+            <a:r>
+              <a:rPr lang="en-US" sz="2100" b="1" dirty="0">
+                <a:solidFill>
+                  <a:srgbClr val="FFFFFF"/>
+                </a:solidFill>
+              </a:rPr>
+              <a:t>A</a:t>
+            </a:r>
+            <a:endParaRPr lang="en-US" sz="2100" dirty="0"/>
+          </a:p>
+        </p:txBody>
+      </p:sp>
+      <p:sp>
+        <p:nvSpPr>
+          <p:cNvPr id="7" name="Text 5"/>
+          <p:cNvSpPr/>
+          <p:nvPr/>
+        </p:nvSpPr>
+        <p:spPr>
+          <a:xfrm>
+            <a:off x="1527048" y="2468880"/>
+            <a:ext cx="2148840" cy="274320"/>
+          </a:xfrm>
+          <a:prstGeom prst="rect">
+            <a:avLst/>
+          </a:prstGeom>
+          <a:noFill/>
+          <a:ln/>
+        </p:spPr>
+        <p:txBody>
+          <a:bodyPr wrap="square" lIns="0" tIns="0" rIns="0" bIns="0" rtlCol="0" anchor="ctr"/>
+          <a:lstStyle/>
+          <a:p>
+            <a:pPr indent="0" marL="0">
+              <a:buNone/>
+            </a:pPr>
+            <a:r>
+              <a:rPr lang="en-US" sz="1400" b="1" dirty="0">
+                <a:solidFill>
+                  <a:srgbClr val="0B65C2"/>
+                </a:solidFill>
+              </a:rPr>
+              <a:t>BACKUP</a:t>
+            </a:r>
+            <a:endParaRPr lang="en-US" sz="1400" dirty="0"/>
+          </a:p>
+        </p:txBody>
+      </p:sp>
+      <p:sp>
+        <p:nvSpPr>
+          <p:cNvPr id="8" name="Text 6"/>
+          <p:cNvSpPr/>
+          <p:nvPr/>
+        </p:nvSpPr>
+        <p:spPr>
+          <a:xfrm>
+            <a:off x="850392" y="3127248"/>
+            <a:ext cx="2880360" cy="749808"/>
+          </a:xfrm>
+          <a:prstGeom prst="rect">
+            <a:avLst/>
+          </a:prstGeom>
+          <a:noFill/>
+          <a:ln/>
+        </p:spPr>
+        <p:txBody>
+          <a:bodyPr wrap="square" lIns="0" tIns="0" rIns="0" bIns="0" rtlCol="0" anchor="ctr">
+            <a:normAutofit/>
+          </a:bodyPr>
+          <a:lstStyle/>
+          <a:p>
+            <a:pPr algn="ctr" indent="0" marL="0">
+              <a:buNone/>
+            </a:pPr>
+            <a:r>
+              <a:rPr lang="en-US" sz="1700" b="1" dirty="0">
+                <a:solidFill>
+                  <a:srgbClr val="12304A"/>
+                </a:solidFill>
+              </a:rPr>
+              <a:t>Último teste de restauração é desconhecido</a:t>
+            </a:r>
+            <a:endParaRPr lang="en-US" sz="1700" dirty="0"/>
+          </a:p>
+        </p:txBody>
+      </p:sp>
+      <p:sp>
+        <p:nvSpPr>
+          <p:cNvPr id="9" name="Text 7"/>
+          <p:cNvSpPr/>
+          <p:nvPr/>
+        </p:nvSpPr>
+        <p:spPr>
+          <a:xfrm>
+            <a:off x="914400" y="4114800"/>
+            <a:ext cx="2761488" cy="256032"/>
+          </a:xfrm>
+          <a:prstGeom prst="rect">
+            <a:avLst/>
+          </a:prstGeom>
+          <a:noFill/>
+          <a:ln/>
+        </p:spPr>
+        <p:txBody>
+          <a:bodyPr wrap="square" lIns="0" tIns="0" rIns="0" bIns="0" rtlCol="0" anchor="ctr"/>
+          <a:lstStyle/>
+          <a:p>
+            <a:pPr algn="ctr" indent="0" marL="0">
+              <a:buNone/>
+            </a:pPr>
+            <a:r>
+              <a:rPr lang="en-US" sz="1300" dirty="0">
+                <a:solidFill>
+                  <a:srgbClr val="4B5E71"/>
+                </a:solidFill>
+              </a:rPr>
+              <a:t>coletar → decidir → validar</a:t>
+            </a:r>
+            <a:endParaRPr lang="en-US" sz="1300" dirty="0"/>
+          </a:p>
+        </p:txBody>
+      </p:sp>
+      <p:sp>
+        <p:nvSpPr>
+          <p:cNvPr id="10" name="Shape 8"/>
+          <p:cNvSpPr/>
+          <p:nvPr/>
+        </p:nvSpPr>
+        <p:spPr>
+          <a:xfrm>
+            <a:off x="4416552" y="2148840"/>
+            <a:ext cx="3401568" cy="2395728"/>
+          </a:xfrm>
+          <a:prstGeom prst="roundRect">
+            <a:avLst/>
+          </a:prstGeom>
+          <a:solidFill>
+            <a:srgbClr val="FFFFFF"/>
+          </a:solidFill>
+          <a:ln w="25400">
+            <a:solidFill>
+              <a:srgbClr val="B75D00"/>
+            </a:solidFill>
+            <a:prstDash val="solid"/>
+          </a:ln>
+        </p:spPr>
+      </p:sp>
+      <p:sp>
+        <p:nvSpPr>
+          <p:cNvPr id="11" name="Text 9"/>
+          <p:cNvSpPr/>
+          <p:nvPr/>
+        </p:nvSpPr>
+        <p:spPr>
+          <a:xfrm>
+            <a:off x="4645152" y="2395728"/>
+            <a:ext cx="566928" cy="475488"/>
+          </a:xfrm>
+          <a:prstGeom prst="rect">
+            <a:avLst/>
+          </a:prstGeom>
+          <a:solidFill>
+            <a:srgbClr val="B75D00"/>
+          </a:solidFill>
+          <a:ln/>
+        </p:spPr>
+        <p:txBody>
+          <a:bodyPr wrap="square" lIns="0" tIns="0" rIns="0" bIns="0" rtlCol="0" anchor="ctr"/>
+          <a:lstStyle/>
+          <a:p>
+            <a:pPr algn="ctr" indent="0" marL="0">
+              <a:buNone/>
+            </a:pPr>
+            <a:r>
+              <a:rPr lang="en-US" sz="2100" b="1" dirty="0">
+                <a:solidFill>
+                  <a:srgbClr val="FFFFFF"/>
+                </a:solidFill>
+              </a:rPr>
+              <a:t>B</a:t>
+            </a:r>
+            <a:endParaRPr lang="en-US" sz="2100" dirty="0"/>
+          </a:p>
+        </p:txBody>
+      </p:sp>
+      <p:sp>
+        <p:nvSpPr>
+          <p:cNvPr id="12" name="Text 10"/>
+          <p:cNvSpPr/>
+          <p:nvPr/>
+        </p:nvSpPr>
+        <p:spPr>
+          <a:xfrm>
+            <a:off x="5349240" y="2468880"/>
+            <a:ext cx="2148840" cy="274320"/>
+          </a:xfrm>
+          <a:prstGeom prst="rect">
+            <a:avLst/>
+          </a:prstGeom>
+          <a:noFill/>
+          <a:ln/>
+        </p:spPr>
+        <p:txBody>
+          <a:bodyPr wrap="square" lIns="0" tIns="0" rIns="0" bIns="0" rtlCol="0" anchor="ctr"/>
+          <a:lstStyle/>
+          <a:p>
+            <a:pPr indent="0" marL="0">
+              <a:buNone/>
+            </a:pPr>
+            <a:r>
+              <a:rPr lang="en-US" sz="1400" b="1" dirty="0">
+                <a:solidFill>
+                  <a:srgbClr val="B75D00"/>
+                </a:solidFill>
+              </a:rPr>
+              <a:t>IDENTIDADE</a:t>
+            </a:r>
+            <a:endParaRPr lang="en-US" sz="1400" dirty="0"/>
+          </a:p>
+        </p:txBody>
+      </p:sp>
+      <p:sp>
+        <p:nvSpPr>
+          <p:cNvPr id="13" name="Text 11"/>
+          <p:cNvSpPr/>
+          <p:nvPr/>
+        </p:nvSpPr>
+        <p:spPr>
+          <a:xfrm>
+            <a:off x="4672584" y="3127248"/>
+            <a:ext cx="2880360" cy="749808"/>
+          </a:xfrm>
+          <a:prstGeom prst="rect">
+            <a:avLst/>
+          </a:prstGeom>
+          <a:noFill/>
+          <a:ln/>
+        </p:spPr>
+        <p:txBody>
+          <a:bodyPr wrap="square" lIns="0" tIns="0" rIns="0" bIns="0" rtlCol="0" anchor="ctr">
+            <a:normAutofit/>
+          </a:bodyPr>
+          <a:lstStyle/>
+          <a:p>
+            <a:pPr algn="ctr" indent="0" marL="0">
+              <a:buNone/>
+            </a:pPr>
+            <a:r>
+              <a:rPr lang="en-US" sz="1700" b="1" dirty="0">
+                <a:solidFill>
+                  <a:srgbClr val="12304A"/>
+                </a:solidFill>
+              </a:rPr>
+              <a:t>svc_support é compartilhada pelo fornecedor</a:t>
+            </a:r>
+            <a:endParaRPr lang="en-US" sz="1700" dirty="0"/>
+          </a:p>
+        </p:txBody>
+      </p:sp>
+      <p:sp>
+        <p:nvSpPr>
+          <p:cNvPr id="14" name="Text 12"/>
+          <p:cNvSpPr/>
+          <p:nvPr/>
+        </p:nvSpPr>
+        <p:spPr>
+          <a:xfrm>
+            <a:off x="4736592" y="4114800"/>
+            <a:ext cx="2761488" cy="256032"/>
+          </a:xfrm>
+          <a:prstGeom prst="rect">
+            <a:avLst/>
+          </a:prstGeom>
+          <a:noFill/>
+          <a:ln/>
+        </p:spPr>
+        <p:txBody>
+          <a:bodyPr wrap="square" lIns="0" tIns="0" rIns="0" bIns="0" rtlCol="0" anchor="ctr"/>
+          <a:lstStyle/>
+          <a:p>
+            <a:pPr algn="ctr" indent="0" marL="0">
+              <a:buNone/>
+            </a:pPr>
+            <a:r>
+              <a:rPr lang="en-US" sz="1300" dirty="0">
+                <a:solidFill>
+                  <a:srgbClr val="4B5E71"/>
+                </a:solidFill>
+              </a:rPr>
+              <a:t>coletar → decidir → validar</a:t>
+            </a:r>
+            <a:endParaRPr lang="en-US" sz="1300" dirty="0"/>
+          </a:p>
+        </p:txBody>
+      </p:sp>
+      <p:sp>
+        <p:nvSpPr>
+          <p:cNvPr id="15" name="Shape 13"/>
+          <p:cNvSpPr/>
+          <p:nvPr/>
+        </p:nvSpPr>
+        <p:spPr>
+          <a:xfrm>
+            <a:off x="8238744" y="2148840"/>
+            <a:ext cx="3401568" cy="2395728"/>
+          </a:xfrm>
+          <a:prstGeom prst="roundRect">
+            <a:avLst/>
+          </a:prstGeom>
+          <a:solidFill>
+            <a:srgbClr val="FFFFFF"/>
+          </a:solidFill>
+          <a:ln w="25400">
+            <a:solidFill>
+              <a:srgbClr val="B42318"/>
+            </a:solidFill>
+            <a:prstDash val="solid"/>
+          </a:ln>
+        </p:spPr>
+      </p:sp>
+      <p:sp>
+        <p:nvSpPr>
+          <p:cNvPr id="16" name="Text 14"/>
+          <p:cNvSpPr/>
+          <p:nvPr/>
+        </p:nvSpPr>
+        <p:spPr>
+          <a:xfrm>
+            <a:off x="8467344" y="2395728"/>
+            <a:ext cx="566928" cy="475488"/>
+          </a:xfrm>
+          <a:prstGeom prst="rect">
+            <a:avLst/>
+          </a:prstGeom>
+          <a:solidFill>
+            <a:srgbClr val="B42318"/>
+          </a:solidFill>
+          <a:ln/>
+        </p:spPr>
+        <p:txBody>
+          <a:bodyPr wrap="square" lIns="0" tIns="0" rIns="0" bIns="0" rtlCol="0" anchor="ctr"/>
+          <a:lstStyle/>
+          <a:p>
+            <a:pPr algn="ctr" indent="0" marL="0">
+              <a:buNone/>
+            </a:pPr>
+            <a:r>
+              <a:rPr lang="en-US" sz="2100" b="1" dirty="0">
+                <a:solidFill>
+                  <a:srgbClr val="FFFFFF"/>
+                </a:solidFill>
+              </a:rPr>
+              <a:t>C</a:t>
+            </a:r>
+            <a:endParaRPr lang="en-US" sz="2100" dirty="0"/>
+          </a:p>
+        </p:txBody>
+      </p:sp>
+      <p:sp>
+        <p:nvSpPr>
+          <p:cNvPr id="17" name="Text 15"/>
+          <p:cNvSpPr/>
+          <p:nvPr/>
+        </p:nvSpPr>
+        <p:spPr>
+          <a:xfrm>
+            <a:off x="9171432" y="2468880"/>
+            <a:ext cx="2148840" cy="274320"/>
+          </a:xfrm>
+          <a:prstGeom prst="rect">
+            <a:avLst/>
+          </a:prstGeom>
+          <a:noFill/>
+          <a:ln/>
+        </p:spPr>
+        <p:txBody>
+          <a:bodyPr wrap="square" lIns="0" tIns="0" rIns="0" bIns="0" rtlCol="0" anchor="ctr"/>
+          <a:lstStyle/>
+          <a:p>
+            <a:pPr indent="0" marL="0">
+              <a:buNone/>
+            </a:pPr>
+            <a:r>
+              <a:rPr lang="en-US" sz="1400" b="1" dirty="0">
+                <a:solidFill>
+                  <a:srgbClr val="B42318"/>
+                </a:solidFill>
+              </a:rPr>
+              <a:t>SESSÃO OT</a:t>
+            </a:r>
+            <a:endParaRPr lang="en-US" sz="1400" dirty="0"/>
+          </a:p>
+        </p:txBody>
+      </p:sp>
+      <p:sp>
+        <p:nvSpPr>
+          <p:cNvPr id="18" name="Text 16"/>
+          <p:cNvSpPr/>
+          <p:nvPr/>
+        </p:nvSpPr>
+        <p:spPr>
+          <a:xfrm>
+            <a:off x="8494776" y="3127248"/>
+            <a:ext cx="2880360" cy="749808"/>
+          </a:xfrm>
+          <a:prstGeom prst="rect">
+            <a:avLst/>
+          </a:prstGeom>
+          <a:noFill/>
+          <a:ln/>
+        </p:spPr>
+        <p:txBody>
+          <a:bodyPr wrap="square" lIns="0" tIns="0" rIns="0" bIns="0" rtlCol="0" anchor="ctr">
+            <a:normAutofit/>
+          </a:bodyPr>
+          <a:lstStyle/>
+          <a:p>
+            <a:pPr algn="ctr" indent="0" marL="0">
+              <a:buNone/>
+            </a:pPr>
+            <a:r>
+              <a:rPr lang="en-US" sz="1700" b="1" dirty="0">
+                <a:solidFill>
+                  <a:srgbClr val="12304A"/>
+                </a:solidFill>
+              </a:rPr>
+              <a:t>Estava no calendário, mas a origem diverge</a:t>
+            </a:r>
+            <a:endParaRPr lang="en-US" sz="1700" dirty="0"/>
+          </a:p>
+        </p:txBody>
+      </p:sp>
+      <p:sp>
+        <p:nvSpPr>
+          <p:cNvPr id="19" name="Text 17"/>
+          <p:cNvSpPr/>
+          <p:nvPr/>
+        </p:nvSpPr>
+        <p:spPr>
+          <a:xfrm>
+            <a:off x="8558784" y="4114800"/>
+            <a:ext cx="2761488" cy="256032"/>
+          </a:xfrm>
+          <a:prstGeom prst="rect">
+            <a:avLst/>
+          </a:prstGeom>
+          <a:noFill/>
+          <a:ln/>
+        </p:spPr>
+        <p:txBody>
+          <a:bodyPr wrap="square" lIns="0" tIns="0" rIns="0" bIns="0" rtlCol="0" anchor="ctr"/>
+          <a:lstStyle/>
+          <a:p>
+            <a:pPr algn="ctr" indent="0" marL="0">
+              <a:buNone/>
+            </a:pPr>
+            <a:r>
+              <a:rPr lang="en-US" sz="1300" dirty="0">
+                <a:solidFill>
+                  <a:srgbClr val="4B5E71"/>
+                </a:solidFill>
+              </a:rPr>
+              <a:t>coletar → decidir → validar</a:t>
+            </a:r>
+            <a:endParaRPr lang="en-US" sz="1300" dirty="0"/>
+          </a:p>
+        </p:txBody>
+      </p:sp>
+      <p:sp>
+        <p:nvSpPr>
+          <p:cNvPr id="20" name="Text 18"/>
+          <p:cNvSpPr/>
+          <p:nvPr/>
+        </p:nvSpPr>
+        <p:spPr>
+          <a:xfrm>
+            <a:off x="822960" y="5120640"/>
+            <a:ext cx="10561320" cy="530352"/>
+          </a:xfrm>
+          <a:prstGeom prst="rect">
+            <a:avLst/>
+          </a:prstGeom>
+          <a:noFill/>
+          <a:ln/>
+        </p:spPr>
+        <p:txBody>
+          <a:bodyPr wrap="square" lIns="0" tIns="0" rIns="0" bIns="0" rtlCol="0" anchor="ctr"/>
+          <a:lstStyle/>
+          <a:p>
+            <a:pPr algn="ctr" indent="0" marL="0">
+              <a:buNone/>
+            </a:pPr>
+            <a:r>
+              <a:rPr lang="en-US" sz="1900" b="1" dirty="0">
+                <a:solidFill>
+                  <a:srgbClr val="12304A"/>
+                </a:solidFill>
+              </a:rPr>
+              <a:t>A cada cartão: o que mudou? qual decisão é autorizada? que evidência evita dano à operação?</a:t>
+            </a:r>
+            <a:endParaRPr lang="en-US" sz="1900" dirty="0"/>
+          </a:p>
+        </p:txBody>
+      </p:sp>
+      <p:sp>
+        <p:nvSpPr>
+          <p:cNvPr id="21" name="Shape 19"/>
+          <p:cNvSpPr/>
+          <p:nvPr/>
+        </p:nvSpPr>
+        <p:spPr>
+          <a:xfrm>
+            <a:off x="548640" y="6473952"/>
+            <a:ext cx="11018520" cy="0"/>
+          </a:xfrm>
+          <a:prstGeom prst="line">
+            <a:avLst/>
+          </a:prstGeom>
+          <a:noFill/>
           <a:ln w="12700">
             <a:solidFill>
               <a:srgbClr val="C9D4DF"/>
@@ -5202,680 +6522,7 @@
       </p:sp>
       <p:sp>
         <p:nvSpPr>
-          <p:cNvPr id="6" name="Text 4"/>
-          <p:cNvSpPr/>
-          <p:nvPr/>
-        </p:nvSpPr>
-        <p:spPr>
-          <a:xfrm>
-            <a:off x="1106424" y="2468880"/>
-            <a:ext cx="658368" cy="502920"/>
-          </a:xfrm>
-          <a:prstGeom prst="rect">
-            <a:avLst/>
-          </a:prstGeom>
-          <a:solidFill>
-            <a:srgbClr val="0B65C2"/>
-          </a:solidFill>
-          <a:ln/>
-        </p:spPr>
-        <p:txBody>
-          <a:bodyPr wrap="square" lIns="0" tIns="0" rIns="0" bIns="0" rtlCol="0" anchor="ctr"/>
-          <a:lstStyle/>
-          <a:p>
-            <a:pPr algn="ctr" indent="0" marL="0">
-              <a:buNone/>
-            </a:pPr>
-            <a:r>
-              <a:rPr lang="en-US" sz="2200" b="1" dirty="0">
-                <a:solidFill>
-                  <a:srgbClr val="FFFFFF"/>
-                </a:solidFill>
-              </a:rPr>
-              <a:t>1</a:t>
-            </a:r>
-            <a:endParaRPr lang="en-US" sz="2200" dirty="0"/>
-          </a:p>
-        </p:txBody>
-      </p:sp>
-      <p:sp>
-        <p:nvSpPr>
-          <p:cNvPr id="7" name="Text 5"/>
-          <p:cNvSpPr/>
-          <p:nvPr/>
-        </p:nvSpPr>
-        <p:spPr>
-          <a:xfrm>
-            <a:off x="530352" y="3182112"/>
-            <a:ext cx="1828800" cy="292608"/>
-          </a:xfrm>
-          <a:prstGeom prst="rect">
-            <a:avLst/>
-          </a:prstGeom>
-          <a:noFill/>
-          <a:ln/>
-        </p:spPr>
-        <p:txBody>
-          <a:bodyPr wrap="square" lIns="0" tIns="0" rIns="0" bIns="0" rtlCol="0" anchor="ctr"/>
-          <a:lstStyle/>
-          <a:p>
-            <a:pPr algn="ctr" indent="0" marL="0">
-              <a:buNone/>
-            </a:pPr>
-            <a:r>
-              <a:rPr lang="en-US" sz="1400" b="1" dirty="0">
-                <a:solidFill>
-                  <a:srgbClr val="12304A"/>
-                </a:solidFill>
-              </a:rPr>
-              <a:t>DESENHAR</a:t>
-            </a:r>
-            <a:endParaRPr lang="en-US" sz="1400" dirty="0"/>
-          </a:p>
-        </p:txBody>
-      </p:sp>
-      <p:sp>
-        <p:nvSpPr>
-          <p:cNvPr id="8" name="Text 6"/>
-          <p:cNvSpPr/>
-          <p:nvPr/>
-        </p:nvSpPr>
-        <p:spPr>
-          <a:xfrm>
-            <a:off x="557784" y="3703320"/>
-            <a:ext cx="1773936" cy="502920"/>
-          </a:xfrm>
-          <a:prstGeom prst="rect">
-            <a:avLst/>
-          </a:prstGeom>
-          <a:noFill/>
-          <a:ln/>
-        </p:spPr>
-        <p:txBody>
-          <a:bodyPr wrap="square" lIns="0" tIns="0" rIns="0" bIns="0" rtlCol="0" anchor="ctr"/>
-          <a:lstStyle/>
-          <a:p>
-            <a:pPr algn="ctr" indent="0" marL="0">
-              <a:buNone/>
-            </a:pPr>
-            <a:r>
-              <a:rPr lang="en-US" sz="1600" dirty="0">
-                <a:solidFill>
-                  <a:srgbClr val="172B4D"/>
-                </a:solidFill>
-              </a:rPr>
-              <a:t>fluxo normal</a:t>
-            </a:r>
-            <a:endParaRPr lang="en-US" sz="1600" dirty="0"/>
-          </a:p>
-        </p:txBody>
-      </p:sp>
-      <p:sp>
-        <p:nvSpPr>
-          <p:cNvPr id="9" name="Shape 7"/>
-          <p:cNvSpPr/>
-          <p:nvPr/>
-        </p:nvSpPr>
-        <p:spPr>
-          <a:xfrm>
-            <a:off x="2752344" y="2240280"/>
-            <a:ext cx="2103120" cy="2331720"/>
-          </a:xfrm>
-          <a:prstGeom prst="roundRect">
-            <a:avLst/>
-          </a:prstGeom>
-          <a:solidFill>
-            <a:srgbClr val="FFFFFF"/>
-          </a:solidFill>
-          <a:ln w="12700">
-            <a:solidFill>
-              <a:srgbClr val="C9D4DF"/>
-            </a:solidFill>
-            <a:prstDash val="solid"/>
-          </a:ln>
-        </p:spPr>
-      </p:sp>
-      <p:sp>
-        <p:nvSpPr>
-          <p:cNvPr id="10" name="Text 8"/>
-          <p:cNvSpPr/>
-          <p:nvPr/>
-        </p:nvSpPr>
-        <p:spPr>
-          <a:xfrm>
-            <a:off x="3465576" y="2468880"/>
-            <a:ext cx="658368" cy="502920"/>
-          </a:xfrm>
-          <a:prstGeom prst="rect">
-            <a:avLst/>
-          </a:prstGeom>
-          <a:solidFill>
-            <a:srgbClr val="0B65C2"/>
-          </a:solidFill>
-          <a:ln/>
-        </p:spPr>
-        <p:txBody>
-          <a:bodyPr wrap="square" lIns="0" tIns="0" rIns="0" bIns="0" rtlCol="0" anchor="ctr"/>
-          <a:lstStyle/>
-          <a:p>
-            <a:pPr algn="ctr" indent="0" marL="0">
-              <a:buNone/>
-            </a:pPr>
-            <a:r>
-              <a:rPr lang="en-US" sz="2200" b="1" dirty="0">
-                <a:solidFill>
-                  <a:srgbClr val="FFFFFF"/>
-                </a:solidFill>
-              </a:rPr>
-              <a:t>2</a:t>
-            </a:r>
-            <a:endParaRPr lang="en-US" sz="2200" dirty="0"/>
-          </a:p>
-        </p:txBody>
-      </p:sp>
-      <p:sp>
-        <p:nvSpPr>
-          <p:cNvPr id="11" name="Text 9"/>
-          <p:cNvSpPr/>
-          <p:nvPr/>
-        </p:nvSpPr>
-        <p:spPr>
-          <a:xfrm>
-            <a:off x="2889504" y="3182112"/>
-            <a:ext cx="1828800" cy="292608"/>
-          </a:xfrm>
-          <a:prstGeom prst="rect">
-            <a:avLst/>
-          </a:prstGeom>
-          <a:noFill/>
-          <a:ln/>
-        </p:spPr>
-        <p:txBody>
-          <a:bodyPr wrap="square" lIns="0" tIns="0" rIns="0" bIns="0" rtlCol="0" anchor="ctr"/>
-          <a:lstStyle/>
-          <a:p>
-            <a:pPr algn="ctr" indent="0" marL="0">
-              <a:buNone/>
-            </a:pPr>
-            <a:r>
-              <a:rPr lang="en-US" sz="1400" b="1" dirty="0">
-                <a:solidFill>
-                  <a:srgbClr val="12304A"/>
-                </a:solidFill>
-              </a:rPr>
-              <a:t>FORMULAR</a:t>
-            </a:r>
-            <a:endParaRPr lang="en-US" sz="1400" dirty="0"/>
-          </a:p>
-        </p:txBody>
-      </p:sp>
-      <p:sp>
-        <p:nvSpPr>
-          <p:cNvPr id="12" name="Text 10"/>
-          <p:cNvSpPr/>
-          <p:nvPr/>
-        </p:nvSpPr>
-        <p:spPr>
-          <a:xfrm>
-            <a:off x="2916936" y="3703320"/>
-            <a:ext cx="1773936" cy="502920"/>
-          </a:xfrm>
-          <a:prstGeom prst="rect">
-            <a:avLst/>
-          </a:prstGeom>
-          <a:noFill/>
-          <a:ln/>
-        </p:spPr>
-        <p:txBody>
-          <a:bodyPr wrap="square" lIns="0" tIns="0" rIns="0" bIns="0" rtlCol="0" anchor="ctr"/>
-          <a:lstStyle/>
-          <a:p>
-            <a:pPr algn="ctr" indent="0" marL="0">
-              <a:buNone/>
-            </a:pPr>
-            <a:r>
-              <a:rPr lang="en-US" sz="1600" dirty="0">
-                <a:solidFill>
-                  <a:srgbClr val="172B4D"/>
-                </a:solidFill>
-              </a:rPr>
-              <a:t>ameaças</a:t>
-            </a:r>
-            <a:endParaRPr lang="en-US" sz="1600" dirty="0"/>
-          </a:p>
-        </p:txBody>
-      </p:sp>
-      <p:sp>
-        <p:nvSpPr>
-          <p:cNvPr id="13" name="Shape 11"/>
-          <p:cNvSpPr/>
-          <p:nvPr/>
-        </p:nvSpPr>
-        <p:spPr>
-          <a:xfrm>
-            <a:off x="5111496" y="2240280"/>
-            <a:ext cx="2103120" cy="2331720"/>
-          </a:xfrm>
-          <a:prstGeom prst="roundRect">
-            <a:avLst/>
-          </a:prstGeom>
-          <a:solidFill>
-            <a:srgbClr val="FFFFFF"/>
-          </a:solidFill>
-          <a:ln w="12700">
-            <a:solidFill>
-              <a:srgbClr val="C9D4DF"/>
-            </a:solidFill>
-            <a:prstDash val="solid"/>
-          </a:ln>
-        </p:spPr>
-      </p:sp>
-      <p:sp>
-        <p:nvSpPr>
-          <p:cNvPr id="14" name="Text 12"/>
-          <p:cNvSpPr/>
-          <p:nvPr/>
-        </p:nvSpPr>
-        <p:spPr>
-          <a:xfrm>
-            <a:off x="5824728" y="2468880"/>
-            <a:ext cx="658368" cy="502920"/>
-          </a:xfrm>
-          <a:prstGeom prst="rect">
-            <a:avLst/>
-          </a:prstGeom>
-          <a:solidFill>
-            <a:srgbClr val="0B65C2"/>
-          </a:solidFill>
-          <a:ln/>
-        </p:spPr>
-        <p:txBody>
-          <a:bodyPr wrap="square" lIns="0" tIns="0" rIns="0" bIns="0" rtlCol="0" anchor="ctr"/>
-          <a:lstStyle/>
-          <a:p>
-            <a:pPr algn="ctr" indent="0" marL="0">
-              <a:buNone/>
-            </a:pPr>
-            <a:r>
-              <a:rPr lang="en-US" sz="2200" b="1" dirty="0">
-                <a:solidFill>
-                  <a:srgbClr val="FFFFFF"/>
-                </a:solidFill>
-              </a:rPr>
-              <a:t>3</a:t>
-            </a:r>
-            <a:endParaRPr lang="en-US" sz="2200" dirty="0"/>
-          </a:p>
-        </p:txBody>
-      </p:sp>
-      <p:sp>
-        <p:nvSpPr>
-          <p:cNvPr id="15" name="Text 13"/>
-          <p:cNvSpPr/>
-          <p:nvPr/>
-        </p:nvSpPr>
-        <p:spPr>
-          <a:xfrm>
-            <a:off x="5248656" y="3182112"/>
-            <a:ext cx="1828800" cy="292608"/>
-          </a:xfrm>
-          <a:prstGeom prst="rect">
-            <a:avLst/>
-          </a:prstGeom>
-          <a:noFill/>
-          <a:ln/>
-        </p:spPr>
-        <p:txBody>
-          <a:bodyPr wrap="square" lIns="0" tIns="0" rIns="0" bIns="0" rtlCol="0" anchor="ctr"/>
-          <a:lstStyle/>
-          <a:p>
-            <a:pPr algn="ctr" indent="0" marL="0">
-              <a:buNone/>
-            </a:pPr>
-            <a:r>
-              <a:rPr lang="en-US" sz="1400" b="1" dirty="0">
-                <a:solidFill>
-                  <a:srgbClr val="12304A"/>
-                </a:solidFill>
-              </a:rPr>
-              <a:t>INJETAR</a:t>
-            </a:r>
-            <a:endParaRPr lang="en-US" sz="1400" dirty="0"/>
-          </a:p>
-        </p:txBody>
-      </p:sp>
-      <p:sp>
-        <p:nvSpPr>
-          <p:cNvPr id="16" name="Text 14"/>
-          <p:cNvSpPr/>
-          <p:nvPr/>
-        </p:nvSpPr>
-        <p:spPr>
-          <a:xfrm>
-            <a:off x="5276088" y="3703320"/>
-            <a:ext cx="1773936" cy="502920"/>
-          </a:xfrm>
-          <a:prstGeom prst="rect">
-            <a:avLst/>
-          </a:prstGeom>
-          <a:noFill/>
-          <a:ln/>
-        </p:spPr>
-        <p:txBody>
-          <a:bodyPr wrap="square" lIns="0" tIns="0" rIns="0" bIns="0" rtlCol="0" anchor="ctr"/>
-          <a:lstStyle/>
-          <a:p>
-            <a:pPr algn="ctr" indent="0" marL="0">
-              <a:buNone/>
-            </a:pPr>
-            <a:r>
-              <a:rPr lang="en-US" sz="1600" dirty="0">
-                <a:solidFill>
-                  <a:srgbClr val="172B4D"/>
-                </a:solidFill>
-              </a:rPr>
-              <a:t>evento fictício</a:t>
-            </a:r>
-            <a:endParaRPr lang="en-US" sz="1600" dirty="0"/>
-          </a:p>
-        </p:txBody>
-      </p:sp>
-      <p:sp>
-        <p:nvSpPr>
-          <p:cNvPr id="17" name="Shape 15"/>
-          <p:cNvSpPr/>
-          <p:nvPr/>
-        </p:nvSpPr>
-        <p:spPr>
-          <a:xfrm>
-            <a:off x="7470648" y="2240280"/>
-            <a:ext cx="2103120" cy="2331720"/>
-          </a:xfrm>
-          <a:prstGeom prst="roundRect">
-            <a:avLst/>
-          </a:prstGeom>
-          <a:solidFill>
-            <a:srgbClr val="FFFFFF"/>
-          </a:solidFill>
-          <a:ln w="12700">
-            <a:solidFill>
-              <a:srgbClr val="C9D4DF"/>
-            </a:solidFill>
-            <a:prstDash val="solid"/>
-          </a:ln>
-        </p:spPr>
-      </p:sp>
-      <p:sp>
-        <p:nvSpPr>
-          <p:cNvPr id="18" name="Text 16"/>
-          <p:cNvSpPr/>
-          <p:nvPr/>
-        </p:nvSpPr>
-        <p:spPr>
-          <a:xfrm>
-            <a:off x="8183880" y="2468880"/>
-            <a:ext cx="658368" cy="502920"/>
-          </a:xfrm>
-          <a:prstGeom prst="rect">
-            <a:avLst/>
-          </a:prstGeom>
-          <a:solidFill>
-            <a:srgbClr val="0B65C2"/>
-          </a:solidFill>
-          <a:ln/>
-        </p:spPr>
-        <p:txBody>
-          <a:bodyPr wrap="square" lIns="0" tIns="0" rIns="0" bIns="0" rtlCol="0" anchor="ctr"/>
-          <a:lstStyle/>
-          <a:p>
-            <a:pPr algn="ctr" indent="0" marL="0">
-              <a:buNone/>
-            </a:pPr>
-            <a:r>
-              <a:rPr lang="en-US" sz="2200" b="1" dirty="0">
-                <a:solidFill>
-                  <a:srgbClr val="FFFFFF"/>
-                </a:solidFill>
-              </a:rPr>
-              <a:t>4</a:t>
-            </a:r>
-            <a:endParaRPr lang="en-US" sz="2200" dirty="0"/>
-          </a:p>
-        </p:txBody>
-      </p:sp>
-      <p:sp>
-        <p:nvSpPr>
-          <p:cNvPr id="19" name="Text 17"/>
-          <p:cNvSpPr/>
-          <p:nvPr/>
-        </p:nvSpPr>
-        <p:spPr>
-          <a:xfrm>
-            <a:off x="7607808" y="3182112"/>
-            <a:ext cx="1828800" cy="292608"/>
-          </a:xfrm>
-          <a:prstGeom prst="rect">
-            <a:avLst/>
-          </a:prstGeom>
-          <a:noFill/>
-          <a:ln/>
-        </p:spPr>
-        <p:txBody>
-          <a:bodyPr wrap="square" lIns="0" tIns="0" rIns="0" bIns="0" rtlCol="0" anchor="ctr"/>
-          <a:lstStyle/>
-          <a:p>
-            <a:pPr algn="ctr" indent="0" marL="0">
-              <a:buNone/>
-            </a:pPr>
-            <a:r>
-              <a:rPr lang="en-US" sz="1400" b="1" dirty="0">
-                <a:solidFill>
-                  <a:srgbClr val="12304A"/>
-                </a:solidFill>
-              </a:rPr>
-              <a:t>DECIDIR</a:t>
-            </a:r>
-            <a:endParaRPr lang="en-US" sz="1400" dirty="0"/>
-          </a:p>
-        </p:txBody>
-      </p:sp>
-      <p:sp>
-        <p:nvSpPr>
-          <p:cNvPr id="20" name="Text 18"/>
-          <p:cNvSpPr/>
-          <p:nvPr/>
-        </p:nvSpPr>
-        <p:spPr>
-          <a:xfrm>
-            <a:off x="7635240" y="3703320"/>
-            <a:ext cx="1773936" cy="502920"/>
-          </a:xfrm>
-          <a:prstGeom prst="rect">
-            <a:avLst/>
-          </a:prstGeom>
-          <a:noFill/>
-          <a:ln/>
-        </p:spPr>
-        <p:txBody>
-          <a:bodyPr wrap="square" lIns="0" tIns="0" rIns="0" bIns="0" rtlCol="0" anchor="ctr"/>
-          <a:lstStyle/>
-          <a:p>
-            <a:pPr algn="ctr" indent="0" marL="0">
-              <a:buNone/>
-            </a:pPr>
-            <a:r>
-              <a:rPr lang="en-US" sz="1600" dirty="0">
-                <a:solidFill>
-                  <a:srgbClr val="172B4D"/>
-                </a:solidFill>
-              </a:rPr>
-              <a:t>coleta/controle</a:t>
-            </a:r>
-            <a:endParaRPr lang="en-US" sz="1600" dirty="0"/>
-          </a:p>
-        </p:txBody>
-      </p:sp>
-      <p:sp>
-        <p:nvSpPr>
-          <p:cNvPr id="21" name="Shape 19"/>
-          <p:cNvSpPr/>
-          <p:nvPr/>
-        </p:nvSpPr>
-        <p:spPr>
-          <a:xfrm>
-            <a:off x="9829800" y="2240280"/>
-            <a:ext cx="2103120" cy="2331720"/>
-          </a:xfrm>
-          <a:prstGeom prst="roundRect">
-            <a:avLst/>
-          </a:prstGeom>
-          <a:solidFill>
-            <a:srgbClr val="FFFFFF"/>
-          </a:solidFill>
-          <a:ln w="25400">
-            <a:solidFill>
-              <a:srgbClr val="26734D"/>
-            </a:solidFill>
-            <a:prstDash val="solid"/>
-          </a:ln>
-        </p:spPr>
-      </p:sp>
-      <p:sp>
-        <p:nvSpPr>
           <p:cNvPr id="22" name="Text 20"/>
-          <p:cNvSpPr/>
-          <p:nvPr/>
-        </p:nvSpPr>
-        <p:spPr>
-          <a:xfrm>
-            <a:off x="10543032" y="2468880"/>
-            <a:ext cx="658368" cy="502920"/>
-          </a:xfrm>
-          <a:prstGeom prst="rect">
-            <a:avLst/>
-          </a:prstGeom>
-          <a:solidFill>
-            <a:srgbClr val="26734D"/>
-          </a:solidFill>
-          <a:ln/>
-        </p:spPr>
-        <p:txBody>
-          <a:bodyPr wrap="square" lIns="0" tIns="0" rIns="0" bIns="0" rtlCol="0" anchor="ctr"/>
-          <a:lstStyle/>
-          <a:p>
-            <a:pPr algn="ctr" indent="0" marL="0">
-              <a:buNone/>
-            </a:pPr>
-            <a:r>
-              <a:rPr lang="en-US" sz="2200" b="1" dirty="0">
-                <a:solidFill>
-                  <a:srgbClr val="FFFFFF"/>
-                </a:solidFill>
-              </a:rPr>
-              <a:t>5</a:t>
-            </a:r>
-            <a:endParaRPr lang="en-US" sz="2200" dirty="0"/>
-          </a:p>
-        </p:txBody>
-      </p:sp>
-      <p:sp>
-        <p:nvSpPr>
-          <p:cNvPr id="23" name="Text 21"/>
-          <p:cNvSpPr/>
-          <p:nvPr/>
-        </p:nvSpPr>
-        <p:spPr>
-          <a:xfrm>
-            <a:off x="9966960" y="3182112"/>
-            <a:ext cx="1828800" cy="292608"/>
-          </a:xfrm>
-          <a:prstGeom prst="rect">
-            <a:avLst/>
-          </a:prstGeom>
-          <a:noFill/>
-          <a:ln/>
-        </p:spPr>
-        <p:txBody>
-          <a:bodyPr wrap="square" lIns="0" tIns="0" rIns="0" bIns="0" rtlCol="0" anchor="ctr"/>
-          <a:lstStyle/>
-          <a:p>
-            <a:pPr algn="ctr" indent="0" marL="0">
-              <a:buNone/>
-            </a:pPr>
-            <a:r>
-              <a:rPr lang="en-US" sz="1400" b="1" dirty="0">
-                <a:solidFill>
-                  <a:srgbClr val="12304A"/>
-                </a:solidFill>
-              </a:rPr>
-              <a:t>VALIDAR</a:t>
-            </a:r>
-            <a:endParaRPr lang="en-US" sz="1400" dirty="0"/>
-          </a:p>
-        </p:txBody>
-      </p:sp>
-      <p:sp>
-        <p:nvSpPr>
-          <p:cNvPr id="24" name="Text 22"/>
-          <p:cNvSpPr/>
-          <p:nvPr/>
-        </p:nvSpPr>
-        <p:spPr>
-          <a:xfrm>
-            <a:off x="9994392" y="3703320"/>
-            <a:ext cx="1773936" cy="502920"/>
-          </a:xfrm>
-          <a:prstGeom prst="rect">
-            <a:avLst/>
-          </a:prstGeom>
-          <a:noFill/>
-          <a:ln/>
-        </p:spPr>
-        <p:txBody>
-          <a:bodyPr wrap="square" lIns="0" tIns="0" rIns="0" bIns="0" rtlCol="0" anchor="ctr"/>
-          <a:lstStyle/>
-          <a:p>
-            <a:pPr algn="ctr" indent="0" marL="0">
-              <a:buNone/>
-            </a:pPr>
-            <a:r>
-              <a:rPr lang="en-US" sz="1600" dirty="0">
-                <a:solidFill>
-                  <a:srgbClr val="172B4D"/>
-                </a:solidFill>
-              </a:rPr>
-              <a:t>risco residual</a:t>
-            </a:r>
-            <a:endParaRPr lang="en-US" sz="1600" dirty="0"/>
-          </a:p>
-        </p:txBody>
-      </p:sp>
-      <p:sp>
-        <p:nvSpPr>
-          <p:cNvPr id="25" name="Shape 23"/>
-          <p:cNvSpPr/>
-          <p:nvPr/>
-        </p:nvSpPr>
-        <p:spPr>
-          <a:xfrm>
-            <a:off x="548640" y="6473952"/>
-            <a:ext cx="11018520" cy="0"/>
-          </a:xfrm>
-          <a:prstGeom prst="line">
-            <a:avLst/>
-          </a:prstGeom>
-          <a:noFill/>
-          <a:ln w="12700">
-            <a:solidFill>
-              <a:srgbClr val="C9D4DF"/>
-            </a:solidFill>
-            <a:prstDash val="solid"/>
-          </a:ln>
-        </p:spPr>
-      </p:sp>
-      <p:sp>
-        <p:nvSpPr>
-          <p:cNvPr id="26" name="Text 24"/>
           <p:cNvSpPr/>
           <p:nvPr/>
         </p:nvSpPr>
@@ -5911,7 +6558,7 @@
       </p:sp>
       <p:sp>
         <p:nvSpPr>
-          <p:cNvPr id="27" name="Text 25"/>
+          <p:cNvPr id="23" name="Text 21"/>
           <p:cNvSpPr/>
           <p:nvPr/>
         </p:nvSpPr>
@@ -5939,7 +6586,7 @@
                   <a:srgbClr val="4B5E71"/>
                 </a:solidFill>
               </a:rPr>
-              <a:t>NIST CSF 2.0 • MITRE CAPEC/ATT&amp;CK</a:t>
+              <a:t>Cenário fictício; nenhuma ação técnica ofensiva</a:t>
             </a:r>
             <a:endParaRPr lang="en-US" sz="900" dirty="0"/>
           </a:p>
@@ -6045,7 +6692,7 @@
                   <a:srgbClr val="12304A"/>
                 </a:solidFill>
               </a:rPr>
-              <a:t>Modele três caminhos e defenda um tratamento</a:t>
+              <a:t>Do diagrama a uma recomendação defensável</a:t>
             </a:r>
             <a:endParaRPr lang="en-US" sz="3000" dirty="0"/>
           </a:p>
@@ -6083,7 +6730,7 @@
                   <a:srgbClr val="4B5E71"/>
                 </a:solidFill>
               </a:rPr>
-              <a:t>O diagrama é evidência de raciocínio, não decoração.</a:t>
+              <a:t>Os grupos usarão o inventário da A02 para reconstruir o sistema, testar hipóteses e justificar tratamento.</a:t>
             </a:r>
             <a:endParaRPr lang="en-US" sz="1700" dirty="0"/>
           </a:p>
@@ -6097,8 +6744,8 @@
         </p:nvSpPr>
         <p:spPr>
           <a:xfrm>
-            <a:off x="731520" y="2011680"/>
-            <a:ext cx="6903720" cy="3337560"/>
+            <a:off x="594360" y="1938528"/>
+            <a:ext cx="6903720" cy="3493008"/>
           </a:xfrm>
           <a:prstGeom prst="roundRect">
             <a:avLst/>
@@ -6122,29 +6769,67 @@
         </p:nvSpPr>
         <p:spPr>
           <a:xfrm>
-            <a:off x="1097280" y="2423160"/>
-            <a:ext cx="1828800" cy="274320"/>
-          </a:xfrm>
-          <a:prstGeom prst="rect">
-            <a:avLst/>
-          </a:prstGeom>
-          <a:noFill/>
-          <a:ln/>
-        </p:spPr>
-        <p:txBody>
-          <a:bodyPr wrap="square" lIns="0" tIns="0" rIns="0" bIns="0" rtlCol="0" anchor="ctr"/>
-          <a:lstStyle/>
-          <a:p>
-            <a:pPr indent="0" marL="0">
+            <a:off x="932688" y="2267712"/>
+            <a:ext cx="3840480" cy="274320"/>
+          </a:xfrm>
+          <a:prstGeom prst="rect">
+            <a:avLst/>
+          </a:prstGeom>
+          <a:noFill/>
+          <a:ln/>
+        </p:spPr>
+        <p:txBody>
+          <a:bodyPr wrap="square" lIns="0" tIns="0" rIns="0" bIns="0" rtlCol="0" anchor="ctr"/>
+          <a:lstStyle/>
+          <a:p>
+            <a:pPr indent="0" marL="0">
+              <a:buNone/>
+            </a:pPr>
+            <a:r>
+              <a:rPr lang="en-US" sz="1300" b="1" dirty="0">
+                <a:solidFill>
+                  <a:srgbClr val="087F7A"/>
+                </a:solidFill>
+              </a:rPr>
+              <a:t>52 MINUTOS • GRUPOS DE 3–4</a:t>
+            </a:r>
+            <a:endParaRPr lang="en-US" sz="1300" dirty="0"/>
+          </a:p>
+        </p:txBody>
+      </p:sp>
+      <p:sp>
+        <p:nvSpPr>
+          <p:cNvPr id="7" name="Text 5"/>
+          <p:cNvSpPr/>
+          <p:nvPr/>
+        </p:nvSpPr>
+        <p:spPr>
+          <a:xfrm>
+            <a:off x="960120" y="2761488"/>
+            <a:ext cx="384048" cy="329184"/>
+          </a:xfrm>
+          <a:prstGeom prst="rect">
+            <a:avLst/>
+          </a:prstGeom>
+          <a:solidFill>
+            <a:srgbClr val="087F7A"/>
+          </a:solidFill>
+          <a:ln/>
+        </p:spPr>
+        <p:txBody>
+          <a:bodyPr wrap="square" lIns="0" tIns="0" rIns="0" bIns="0" rtlCol="0" anchor="ctr"/>
+          <a:lstStyle/>
+          <a:p>
+            <a:pPr algn="ctr" indent="0" marL="0">
               <a:buNone/>
             </a:pPr>
             <a:r>
               <a:rPr lang="en-US" sz="1500" b="1" dirty="0">
                 <a:solidFill>
-                  <a:srgbClr val="087F7A"/>
-                </a:solidFill>
-              </a:rPr>
-              <a:t>MISSÃO</a:t>
+                  <a:srgbClr val="FFFFFF"/>
+                </a:solidFill>
+              </a:rPr>
+              <a:t>1</a:t>
             </a:r>
             <a:endParaRPr lang="en-US" sz="1500" dirty="0"/>
           </a:p>
@@ -6152,51 +6837,271 @@
       </p:sp>
       <p:sp>
         <p:nvSpPr>
-          <p:cNvPr id="7" name="Text 5"/>
-          <p:cNvSpPr/>
-          <p:nvPr/>
-        </p:nvSpPr>
-        <p:spPr>
-          <a:xfrm>
-            <a:off x="1097280" y="2971800"/>
-            <a:ext cx="5760720" cy="1325880"/>
-          </a:xfrm>
-          <a:prstGeom prst="rect">
-            <a:avLst/>
-          </a:prstGeom>
-          <a:noFill/>
-          <a:ln/>
-        </p:spPr>
-        <p:txBody>
-          <a:bodyPr wrap="square" lIns="0" tIns="0" rIns="0" bIns="0" rtlCol="0" anchor="ctr">
-            <a:normAutofit/>
-          </a:bodyPr>
-          <a:lstStyle/>
-          <a:p>
-            <a:pPr indent="0" marL="0">
-              <a:buNone/>
-            </a:pPr>
-            <a:r>
-              <a:rPr lang="en-US" sz="2600" b="1" dirty="0">
+          <p:cNvPr id="8" name="Text 6"/>
+          <p:cNvSpPr/>
+          <p:nvPr/>
+        </p:nvSpPr>
+        <p:spPr>
+          <a:xfrm>
+            <a:off x="1508760" y="2779776"/>
+            <a:ext cx="5212080" cy="292608"/>
+          </a:xfrm>
+          <a:prstGeom prst="rect">
+            <a:avLst/>
+          </a:prstGeom>
+          <a:noFill/>
+          <a:ln/>
+        </p:spPr>
+        <p:txBody>
+          <a:bodyPr wrap="square" lIns="0" tIns="0" rIns="0" bIns="0" rtlCol="0" anchor="ctr"/>
+          <a:lstStyle/>
+          <a:p>
+            <a:pPr indent="0" marL="0">
+              <a:buNone/>
+            </a:pPr>
+            <a:r>
+              <a:rPr lang="en-US" sz="1700" b="1" dirty="0">
                 <a:solidFill>
                   <a:srgbClr val="12304A"/>
                 </a:solidFill>
               </a:rPr>
-              <a:t>Mapeie fronteiras, conduza o tabletop e registre risco, controle e reteste.</a:t>
-            </a:r>
-            <a:endParaRPr lang="en-US" sz="2600" dirty="0"/>
-          </a:p>
-        </p:txBody>
-      </p:sp>
-      <p:sp>
-        <p:nvSpPr>
-          <p:cNvPr id="8" name="Text 6"/>
-          <p:cNvSpPr/>
-          <p:nvPr/>
-        </p:nvSpPr>
-        <p:spPr>
-          <a:xfrm>
-            <a:off x="8321040" y="2331720"/>
+              <a:t>Fluxo normal + fronteiras</a:t>
+            </a:r>
+            <a:endParaRPr lang="en-US" sz="1700" dirty="0"/>
+          </a:p>
+        </p:txBody>
+      </p:sp>
+      <p:sp>
+        <p:nvSpPr>
+          <p:cNvPr id="9" name="Text 7"/>
+          <p:cNvSpPr/>
+          <p:nvPr/>
+        </p:nvSpPr>
+        <p:spPr>
+          <a:xfrm>
+            <a:off x="960120" y="3337560"/>
+            <a:ext cx="384048" cy="329184"/>
+          </a:xfrm>
+          <a:prstGeom prst="rect">
+            <a:avLst/>
+          </a:prstGeom>
+          <a:solidFill>
+            <a:srgbClr val="087F7A"/>
+          </a:solidFill>
+          <a:ln/>
+        </p:spPr>
+        <p:txBody>
+          <a:bodyPr wrap="square" lIns="0" tIns="0" rIns="0" bIns="0" rtlCol="0" anchor="ctr"/>
+          <a:lstStyle/>
+          <a:p>
+            <a:pPr algn="ctr" indent="0" marL="0">
+              <a:buNone/>
+            </a:pPr>
+            <a:r>
+              <a:rPr lang="en-US" sz="1500" b="1" dirty="0">
+                <a:solidFill>
+                  <a:srgbClr val="FFFFFF"/>
+                </a:solidFill>
+              </a:rPr>
+              <a:t>2</a:t>
+            </a:r>
+            <a:endParaRPr lang="en-US" sz="1500" dirty="0"/>
+          </a:p>
+        </p:txBody>
+      </p:sp>
+      <p:sp>
+        <p:nvSpPr>
+          <p:cNvPr id="10" name="Text 8"/>
+          <p:cNvSpPr/>
+          <p:nvPr/>
+        </p:nvSpPr>
+        <p:spPr>
+          <a:xfrm>
+            <a:off x="1508760" y="3355848"/>
+            <a:ext cx="5212080" cy="292608"/>
+          </a:xfrm>
+          <a:prstGeom prst="rect">
+            <a:avLst/>
+          </a:prstGeom>
+          <a:noFill/>
+          <a:ln/>
+        </p:spPr>
+        <p:txBody>
+          <a:bodyPr wrap="square" lIns="0" tIns="0" rIns="0" bIns="0" rtlCol="0" anchor="ctr"/>
+          <a:lstStyle/>
+          <a:p>
+            <a:pPr indent="0" marL="0">
+              <a:buNone/>
+            </a:pPr>
+            <a:r>
+              <a:rPr lang="en-US" sz="1700" b="1" dirty="0">
+                <a:solidFill>
+                  <a:srgbClr val="12304A"/>
+                </a:solidFill>
+              </a:rPr>
+              <a:t>3 ameaças + 3 caminhos</a:t>
+            </a:r>
+            <a:endParaRPr lang="en-US" sz="1700" dirty="0"/>
+          </a:p>
+        </p:txBody>
+      </p:sp>
+      <p:sp>
+        <p:nvSpPr>
+          <p:cNvPr id="11" name="Text 9"/>
+          <p:cNvSpPr/>
+          <p:nvPr/>
+        </p:nvSpPr>
+        <p:spPr>
+          <a:xfrm>
+            <a:off x="960120" y="3913632"/>
+            <a:ext cx="384048" cy="329184"/>
+          </a:xfrm>
+          <a:prstGeom prst="rect">
+            <a:avLst/>
+          </a:prstGeom>
+          <a:solidFill>
+            <a:srgbClr val="087F7A"/>
+          </a:solidFill>
+          <a:ln/>
+        </p:spPr>
+        <p:txBody>
+          <a:bodyPr wrap="square" lIns="0" tIns="0" rIns="0" bIns="0" rtlCol="0" anchor="ctr"/>
+          <a:lstStyle/>
+          <a:p>
+            <a:pPr algn="ctr" indent="0" marL="0">
+              <a:buNone/>
+            </a:pPr>
+            <a:r>
+              <a:rPr lang="en-US" sz="1500" b="1" dirty="0">
+                <a:solidFill>
+                  <a:srgbClr val="FFFFFF"/>
+                </a:solidFill>
+              </a:rPr>
+              <a:t>3</a:t>
+            </a:r>
+            <a:endParaRPr lang="en-US" sz="1500" dirty="0"/>
+          </a:p>
+        </p:txBody>
+      </p:sp>
+      <p:sp>
+        <p:nvSpPr>
+          <p:cNvPr id="12" name="Text 10"/>
+          <p:cNvSpPr/>
+          <p:nvPr/>
+        </p:nvSpPr>
+        <p:spPr>
+          <a:xfrm>
+            <a:off x="1508760" y="3931920"/>
+            <a:ext cx="5212080" cy="292608"/>
+          </a:xfrm>
+          <a:prstGeom prst="rect">
+            <a:avLst/>
+          </a:prstGeom>
+          <a:noFill/>
+          <a:ln/>
+        </p:spPr>
+        <p:txBody>
+          <a:bodyPr wrap="square" lIns="0" tIns="0" rIns="0" bIns="0" rtlCol="0" anchor="ctr"/>
+          <a:lstStyle/>
+          <a:p>
+            <a:pPr indent="0" marL="0">
+              <a:buNone/>
+            </a:pPr>
+            <a:r>
+              <a:rPr lang="en-US" sz="1700" b="1" dirty="0">
+                <a:solidFill>
+                  <a:srgbClr val="12304A"/>
+                </a:solidFill>
+              </a:rPr>
+              <a:t>Cartões + revisão do risco</a:t>
+            </a:r>
+            <a:endParaRPr lang="en-US" sz="1700" dirty="0"/>
+          </a:p>
+        </p:txBody>
+      </p:sp>
+      <p:sp>
+        <p:nvSpPr>
+          <p:cNvPr id="13" name="Text 11"/>
+          <p:cNvSpPr/>
+          <p:nvPr/>
+        </p:nvSpPr>
+        <p:spPr>
+          <a:xfrm>
+            <a:off x="960120" y="4489704"/>
+            <a:ext cx="384048" cy="329184"/>
+          </a:xfrm>
+          <a:prstGeom prst="rect">
+            <a:avLst/>
+          </a:prstGeom>
+          <a:solidFill>
+            <a:srgbClr val="087F7A"/>
+          </a:solidFill>
+          <a:ln/>
+        </p:spPr>
+        <p:txBody>
+          <a:bodyPr wrap="square" lIns="0" tIns="0" rIns="0" bIns="0" rtlCol="0" anchor="ctr"/>
+          <a:lstStyle/>
+          <a:p>
+            <a:pPr algn="ctr" indent="0" marL="0">
+              <a:buNone/>
+            </a:pPr>
+            <a:r>
+              <a:rPr lang="en-US" sz="1500" b="1" dirty="0">
+                <a:solidFill>
+                  <a:srgbClr val="FFFFFF"/>
+                </a:solidFill>
+              </a:rPr>
+              <a:t>4</a:t>
+            </a:r>
+            <a:endParaRPr lang="en-US" sz="1500" dirty="0"/>
+          </a:p>
+        </p:txBody>
+      </p:sp>
+      <p:sp>
+        <p:nvSpPr>
+          <p:cNvPr id="14" name="Text 12"/>
+          <p:cNvSpPr/>
+          <p:nvPr/>
+        </p:nvSpPr>
+        <p:spPr>
+          <a:xfrm>
+            <a:off x="1508760" y="4507992"/>
+            <a:ext cx="5212080" cy="292608"/>
+          </a:xfrm>
+          <a:prstGeom prst="rect">
+            <a:avLst/>
+          </a:prstGeom>
+          <a:noFill/>
+          <a:ln/>
+        </p:spPr>
+        <p:txBody>
+          <a:bodyPr wrap="square" lIns="0" tIns="0" rIns="0" bIns="0" rtlCol="0" anchor="ctr"/>
+          <a:lstStyle/>
+          <a:p>
+            <a:pPr indent="0" marL="0">
+              <a:buNone/>
+            </a:pPr>
+            <a:r>
+              <a:rPr lang="en-US" sz="1700" b="1" dirty="0">
+                <a:solidFill>
+                  <a:srgbClr val="12304A"/>
+                </a:solidFill>
+              </a:rPr>
+              <a:t>Tratamento + reteste</a:t>
+            </a:r>
+            <a:endParaRPr lang="en-US" sz="1700" dirty="0"/>
+          </a:p>
+        </p:txBody>
+      </p:sp>
+      <p:sp>
+        <p:nvSpPr>
+          <p:cNvPr id="15" name="Text 13"/>
+          <p:cNvSpPr/>
+          <p:nvPr/>
+        </p:nvSpPr>
+        <p:spPr>
+          <a:xfrm>
+            <a:off x="8092440" y="2176272"/>
             <a:ext cx="2377440" cy="274320"/>
           </a:xfrm>
           <a:prstGeom prst="rect">
@@ -6213,134 +7118,134 @@
               <a:buNone/>
             </a:pPr>
             <a:r>
-              <a:rPr lang="en-US" sz="1500" b="1" dirty="0">
+              <a:rPr lang="en-US" sz="1400" b="1" dirty="0">
                 <a:solidFill>
                   <a:srgbClr val="0B65C2"/>
                 </a:solidFill>
               </a:rPr>
               <a:t>ENTREGA</a:t>
             </a:r>
-            <a:endParaRPr lang="en-US" sz="1500" dirty="0"/>
-          </a:p>
-        </p:txBody>
-      </p:sp>
-      <p:sp>
-        <p:nvSpPr>
-          <p:cNvPr id="9" name="Text 7"/>
-          <p:cNvSpPr/>
-          <p:nvPr/>
-        </p:nvSpPr>
-        <p:spPr>
-          <a:xfrm>
-            <a:off x="8321040" y="2834640"/>
-            <a:ext cx="2834640" cy="1600200"/>
-          </a:xfrm>
-          <a:prstGeom prst="rect">
-            <a:avLst/>
-          </a:prstGeom>
-          <a:noFill/>
-          <a:ln/>
-        </p:spPr>
-        <p:txBody>
-          <a:bodyPr wrap="square" lIns="0" tIns="0" rIns="0" bIns="0" rtlCol="0" anchor="ctr"/>
-          <a:lstStyle/>
-          <a:p>
-            <a:pPr indent="0" marL="0">
-              <a:buNone/>
-            </a:pPr>
-            <a:r>
-              <a:rPr lang="en-US" sz="2000" b="1" dirty="0">
+            <a:endParaRPr lang="en-US" sz="1400" dirty="0"/>
+          </a:p>
+        </p:txBody>
+      </p:sp>
+      <p:sp>
+        <p:nvSpPr>
+          <p:cNvPr id="16" name="Text 14"/>
+          <p:cNvSpPr/>
+          <p:nvPr/>
+        </p:nvSpPr>
+        <p:spPr>
+          <a:xfrm>
+            <a:off x="8092440" y="2670048"/>
+            <a:ext cx="3246120" cy="1783080"/>
+          </a:xfrm>
+          <a:prstGeom prst="rect">
+            <a:avLst/>
+          </a:prstGeom>
+          <a:noFill/>
+          <a:ln/>
+        </p:spPr>
+        <p:txBody>
+          <a:bodyPr wrap="square" lIns="0" tIns="0" rIns="0" bIns="0" rtlCol="0" anchor="ctr"/>
+          <a:lstStyle/>
+          <a:p>
+            <a:pPr indent="0" marL="0">
+              <a:buNone/>
+            </a:pPr>
+            <a:r>
+              <a:rPr lang="en-US" sz="1800" b="1" dirty="0">
                 <a:solidFill>
                   <a:srgbClr val="12304A"/>
                 </a:solidFill>
               </a:rPr>
-              <a:t>Diagrama</a:t>
-            </a:r>
-            <a:endParaRPr lang="en-US" sz="2000" dirty="0"/>
-          </a:p>
-          <a:p>
-            <a:pPr indent="0" marL="0">
-              <a:buNone/>
-            </a:pPr>
-            <a:r>
-              <a:rPr lang="en-US" sz="2000" b="1" dirty="0">
+              <a:t>Diagrama legível</a:t>
+            </a:r>
+            <a:endParaRPr lang="en-US" sz="1800" dirty="0"/>
+          </a:p>
+          <a:p>
+            <a:pPr indent="0" marL="0">
+              <a:buNone/>
+            </a:pPr>
+            <a:r>
+              <a:rPr lang="en-US" sz="1800" b="1" dirty="0">
                 <a:solidFill>
                   <a:srgbClr val="12304A"/>
                 </a:solidFill>
               </a:rPr>
-              <a:t>3 caminhos</a:t>
-            </a:r>
-            <a:endParaRPr lang="en-US" sz="2000" dirty="0"/>
-          </a:p>
-          <a:p>
-            <a:pPr indent="0" marL="0">
-              <a:buNone/>
-            </a:pPr>
-            <a:r>
-              <a:rPr lang="en-US" sz="2000" b="1" dirty="0">
+              <a:t>3 caminhos comentados</a:t>
+            </a:r>
+            <a:endParaRPr lang="en-US" sz="1800" dirty="0"/>
+          </a:p>
+          <a:p>
+            <a:pPr indent="0" marL="0">
+              <a:buNone/>
+            </a:pPr>
+            <a:r>
+              <a:rPr lang="en-US" sz="1800" b="1" dirty="0">
                 <a:solidFill>
                   <a:srgbClr val="12304A"/>
                 </a:solidFill>
               </a:rPr>
               <a:t>Registro de risco</a:t>
             </a:r>
-            <a:endParaRPr lang="en-US" sz="2000" dirty="0"/>
-          </a:p>
-          <a:p>
-            <a:pPr indent="0" marL="0">
-              <a:buNone/>
-            </a:pPr>
-            <a:r>
-              <a:rPr lang="en-US" sz="2000" b="1" dirty="0">
+            <a:endParaRPr lang="en-US" sz="1800" dirty="0"/>
+          </a:p>
+          <a:p>
+            <a:pPr indent="0" marL="0">
+              <a:buNone/>
+            </a:pPr>
+            <a:r>
+              <a:rPr lang="en-US" sz="1800" b="1" dirty="0">
                 <a:solidFill>
                   <a:srgbClr val="12304A"/>
                 </a:solidFill>
               </a:rPr>
-              <a:t>Validação</a:t>
-            </a:r>
-            <a:endParaRPr lang="en-US" sz="2000" dirty="0"/>
-          </a:p>
-        </p:txBody>
-      </p:sp>
-      <p:sp>
-        <p:nvSpPr>
-          <p:cNvPr id="10" name="Text 8"/>
-          <p:cNvSpPr/>
-          <p:nvPr/>
-        </p:nvSpPr>
-        <p:spPr>
-          <a:xfrm>
-            <a:off x="8321040" y="4800600"/>
-            <a:ext cx="2834640" cy="457200"/>
-          </a:xfrm>
-          <a:prstGeom prst="rect">
-            <a:avLst/>
-          </a:prstGeom>
-          <a:noFill/>
-          <a:ln/>
-        </p:spPr>
-        <p:txBody>
-          <a:bodyPr wrap="square" lIns="0" tIns="0" rIns="0" bIns="0" rtlCol="0" anchor="ctr"/>
-          <a:lstStyle/>
-          <a:p>
-            <a:pPr indent="0" marL="0">
-              <a:buNone/>
-            </a:pPr>
-            <a:r>
-              <a:rPr lang="en-US" sz="1400" dirty="0">
+              <a:t>Controle e evidência de validação</a:t>
+            </a:r>
+            <a:endParaRPr lang="en-US" sz="1800" dirty="0"/>
+          </a:p>
+        </p:txBody>
+      </p:sp>
+      <p:sp>
+        <p:nvSpPr>
+          <p:cNvPr id="17" name="Text 15"/>
+          <p:cNvSpPr/>
+          <p:nvPr/>
+        </p:nvSpPr>
+        <p:spPr>
+          <a:xfrm>
+            <a:off x="8092440" y="4800600"/>
+            <a:ext cx="3246120" cy="438912"/>
+          </a:xfrm>
+          <a:prstGeom prst="rect">
+            <a:avLst/>
+          </a:prstGeom>
+          <a:noFill/>
+          <a:ln/>
+        </p:spPr>
+        <p:txBody>
+          <a:bodyPr wrap="square" lIns="0" tIns="0" rIns="0" bIns="0" rtlCol="0" anchor="ctr"/>
+          <a:lstStyle/>
+          <a:p>
+            <a:pPr indent="0" marL="0">
+              <a:buNone/>
+            </a:pPr>
+            <a:r>
+              <a:rPr lang="en-US" sz="1350" dirty="0">
                 <a:solidFill>
                   <a:srgbClr val="B42318"/>
                 </a:solidFill>
               </a:rPr>
-              <a:t>Sem malware ou indisponibilidade</a:t>
-            </a:r>
-            <a:endParaRPr lang="en-US" sz="1400" dirty="0"/>
-          </a:p>
-        </p:txBody>
-      </p:sp>
-      <p:sp>
-        <p:nvSpPr>
-          <p:cNvPr id="11" name="Shape 9"/>
+              <a:t>Sem malware, varredura ou indisponibilidade</a:t>
+            </a:r>
+            <a:endParaRPr lang="en-US" sz="1350" dirty="0"/>
+          </a:p>
+        </p:txBody>
+      </p:sp>
+      <p:sp>
+        <p:nvSpPr>
+          <p:cNvPr id="18" name="Shape 16"/>
           <p:cNvSpPr/>
           <p:nvPr/>
         </p:nvSpPr>
@@ -6363,7 +7268,7 @@
       </p:sp>
       <p:sp>
         <p:nvSpPr>
-          <p:cNvPr id="12" name="Text 10"/>
+          <p:cNvPr id="19" name="Text 17"/>
           <p:cNvSpPr/>
           <p:nvPr/>
         </p:nvSpPr>
@@ -6399,7 +7304,7 @@
       </p:sp>
       <p:sp>
         <p:nvSpPr>
-          <p:cNvPr id="13" name="Text 11"/>
+          <p:cNvPr id="20" name="Text 18"/>
           <p:cNvSpPr/>
           <p:nvPr/>
         </p:nvSpPr>
@@ -6533,7 +7438,7 @@
                   <a:srgbClr val="12304A"/>
                 </a:solidFill>
               </a:rPr>
-              <a:t>Modelo bom muda uma decisão</a:t>
+              <a:t>Um modelo bom muda uma decisão</a:t>
             </a:r>
             <a:endParaRPr lang="en-US" sz="3000" dirty="0"/>
           </a:p>
@@ -6571,7 +7476,7 @@
                   <a:srgbClr val="4B5E71"/>
                 </a:solidFill>
               </a:rPr>
-              <a:t>Fronteira, caminho, consequência, controle e evidência formam um argumento.</a:t>
+              <a:t>Partimos de eventos correlacionados; terminamos com premissas explícitas, um ponto de interrupção e um teste.</a:t>
             </a:r>
             <a:endParaRPr lang="en-US" sz="1700" dirty="0"/>
           </a:p>
@@ -6585,8 +7490,8 @@
         </p:nvSpPr>
         <p:spPr>
           <a:xfrm>
-            <a:off x="411480" y="2423160"/>
-            <a:ext cx="2103120" cy="1097280"/>
+            <a:off x="347472" y="2221992"/>
+            <a:ext cx="2148840" cy="1481328"/>
           </a:xfrm>
           <a:prstGeom prst="roundRect">
             <a:avLst/>
@@ -6610,8 +7515,8 @@
         </p:nvSpPr>
         <p:spPr>
           <a:xfrm>
-            <a:off x="521208" y="2770632"/>
-            <a:ext cx="1883664" cy="320040"/>
+            <a:off x="457200" y="2496312"/>
+            <a:ext cx="1929384" cy="274320"/>
           </a:xfrm>
           <a:prstGeom prst="rect">
             <a:avLst/>
@@ -6627,27 +7532,63 @@
               <a:buNone/>
             </a:pPr>
             <a:r>
-              <a:rPr lang="en-US" sz="1500" b="1" dirty="0">
+              <a:rPr lang="en-US" sz="1300" b="1" dirty="0">
                 <a:solidFill>
                   <a:srgbClr val="FFFFFF"/>
                 </a:solidFill>
               </a:rPr>
-              <a:t>DESENHAR</a:t>
-            </a:r>
-            <a:endParaRPr lang="en-US" sz="1500" dirty="0"/>
-          </a:p>
-        </p:txBody>
-      </p:sp>
-      <p:sp>
-        <p:nvSpPr>
-          <p:cNvPr id="7" name="Shape 5"/>
-          <p:cNvSpPr/>
-          <p:nvPr/>
-        </p:nvSpPr>
-        <p:spPr>
-          <a:xfrm>
-            <a:off x="2770632" y="2423160"/>
-            <a:ext cx="2103120" cy="1097280"/>
+              <a:t>EVIDÊNCIA</a:t>
+            </a:r>
+            <a:endParaRPr lang="en-US" sz="1300" dirty="0"/>
+          </a:p>
+        </p:txBody>
+      </p:sp>
+      <p:sp>
+        <p:nvSpPr>
+          <p:cNvPr id="7" name="Text 5"/>
+          <p:cNvSpPr/>
+          <p:nvPr/>
+        </p:nvSpPr>
+        <p:spPr>
+          <a:xfrm>
+            <a:off x="512064" y="2971800"/>
+            <a:ext cx="1819656" cy="384048"/>
+          </a:xfrm>
+          <a:prstGeom prst="rect">
+            <a:avLst/>
+          </a:prstGeom>
+          <a:noFill/>
+          <a:ln/>
+        </p:spPr>
+        <p:txBody>
+          <a:bodyPr wrap="square" lIns="0" tIns="0" rIns="0" bIns="0" rtlCol="0" anchor="ctr"/>
+          <a:lstStyle/>
+          <a:p>
+            <a:pPr algn="ctr" indent="0" marL="0">
+              <a:buNone/>
+            </a:pPr>
+            <a:r>
+              <a:rPr lang="en-US" sz="1400" dirty="0">
+                <a:solidFill>
+                  <a:srgbClr val="FFFFFF"/>
+                </a:solidFill>
+              </a:rPr>
+              <a:t>o que observamos</a:t>
+            </a:r>
+            <a:endParaRPr lang="en-US" sz="1400" dirty="0"/>
+          </a:p>
+        </p:txBody>
+      </p:sp>
+      <p:sp>
+        <p:nvSpPr>
+          <p:cNvPr id="8" name="Shape 6"/>
+          <p:cNvSpPr/>
+          <p:nvPr/>
+        </p:nvSpPr>
+        <p:spPr>
+          <a:xfrm>
+            <a:off x="2706624" y="2221992"/>
+            <a:ext cx="2148840" cy="1481328"/>
           </a:xfrm>
           <a:prstGeom prst="roundRect">
             <a:avLst/>
@@ -6665,14 +7606,14 @@
       </p:sp>
       <p:sp>
         <p:nvSpPr>
-          <p:cNvPr id="8" name="Text 6"/>
-          <p:cNvSpPr/>
-          <p:nvPr/>
-        </p:nvSpPr>
-        <p:spPr>
-          <a:xfrm>
-            <a:off x="2880360" y="2770632"/>
-            <a:ext cx="1883664" cy="320040"/>
+          <p:cNvPr id="9" name="Text 7"/>
+          <p:cNvSpPr/>
+          <p:nvPr/>
+        </p:nvSpPr>
+        <p:spPr>
+          <a:xfrm>
+            <a:off x="2816352" y="2496312"/>
+            <a:ext cx="1929384" cy="274320"/>
           </a:xfrm>
           <a:prstGeom prst="rect">
             <a:avLst/>
@@ -6688,27 +7629,63 @@
               <a:buNone/>
             </a:pPr>
             <a:r>
-              <a:rPr lang="en-US" sz="1500" b="1" dirty="0">
+              <a:rPr lang="en-US" sz="1300" b="1" dirty="0">
                 <a:solidFill>
                   <a:srgbClr val="FFFFFF"/>
                 </a:solidFill>
               </a:rPr>
-              <a:t>PERGUNTAR</a:t>
-            </a:r>
-            <a:endParaRPr lang="en-US" sz="1500" dirty="0"/>
-          </a:p>
-        </p:txBody>
-      </p:sp>
-      <p:sp>
-        <p:nvSpPr>
-          <p:cNvPr id="9" name="Shape 7"/>
-          <p:cNvSpPr/>
-          <p:nvPr/>
-        </p:nvSpPr>
-        <p:spPr>
-          <a:xfrm>
-            <a:off x="5129784" y="2423160"/>
-            <a:ext cx="2103120" cy="1097280"/>
+              <a:t>CAMINHO</a:t>
+            </a:r>
+            <a:endParaRPr lang="en-US" sz="1300" dirty="0"/>
+          </a:p>
+        </p:txBody>
+      </p:sp>
+      <p:sp>
+        <p:nvSpPr>
+          <p:cNvPr id="10" name="Text 8"/>
+          <p:cNvSpPr/>
+          <p:nvPr/>
+        </p:nvSpPr>
+        <p:spPr>
+          <a:xfrm>
+            <a:off x="2871216" y="2971800"/>
+            <a:ext cx="1819656" cy="384048"/>
+          </a:xfrm>
+          <a:prstGeom prst="rect">
+            <a:avLst/>
+          </a:prstGeom>
+          <a:noFill/>
+          <a:ln/>
+        </p:spPr>
+        <p:txBody>
+          <a:bodyPr wrap="square" lIns="0" tIns="0" rIns="0" bIns="0" rtlCol="0" anchor="ctr"/>
+          <a:lstStyle/>
+          <a:p>
+            <a:pPr algn="ctr" indent="0" marL="0">
+              <a:buNone/>
+            </a:pPr>
+            <a:r>
+              <a:rPr lang="en-US" sz="1400" dirty="0">
+                <a:solidFill>
+                  <a:srgbClr val="FFFFFF"/>
+                </a:solidFill>
+              </a:rPr>
+              <a:t>o que precisa ser verdade</a:t>
+            </a:r>
+            <a:endParaRPr lang="en-US" sz="1400" dirty="0"/>
+          </a:p>
+        </p:txBody>
+      </p:sp>
+      <p:sp>
+        <p:nvSpPr>
+          <p:cNvPr id="11" name="Shape 9"/>
+          <p:cNvSpPr/>
+          <p:nvPr/>
+        </p:nvSpPr>
+        <p:spPr>
+          <a:xfrm>
+            <a:off x="5065776" y="2221992"/>
+            <a:ext cx="2148840" cy="1481328"/>
           </a:xfrm>
           <a:prstGeom prst="roundRect">
             <a:avLst/>
@@ -6726,14 +7703,14 @@
       </p:sp>
       <p:sp>
         <p:nvSpPr>
-          <p:cNvPr id="10" name="Text 8"/>
-          <p:cNvSpPr/>
-          <p:nvPr/>
-        </p:nvSpPr>
-        <p:spPr>
-          <a:xfrm>
-            <a:off x="5239512" y="2770632"/>
-            <a:ext cx="1883664" cy="320040"/>
+          <p:cNvPr id="12" name="Text 10"/>
+          <p:cNvSpPr/>
+          <p:nvPr/>
+        </p:nvSpPr>
+        <p:spPr>
+          <a:xfrm>
+            <a:off x="5175504" y="2496312"/>
+            <a:ext cx="1929384" cy="274320"/>
           </a:xfrm>
           <a:prstGeom prst="rect">
             <a:avLst/>
@@ -6749,27 +7726,63 @@
               <a:buNone/>
             </a:pPr>
             <a:r>
-              <a:rPr lang="en-US" sz="1500" b="1" dirty="0">
+              <a:rPr lang="en-US" sz="1300" b="1" dirty="0">
                 <a:solidFill>
                   <a:srgbClr val="FFFFFF"/>
                 </a:solidFill>
               </a:rPr>
-              <a:t>ENCENAR</a:t>
-            </a:r>
-            <a:endParaRPr lang="en-US" sz="1500" dirty="0"/>
-          </a:p>
-        </p:txBody>
-      </p:sp>
-      <p:sp>
-        <p:nvSpPr>
-          <p:cNvPr id="11" name="Shape 9"/>
-          <p:cNvSpPr/>
-          <p:nvPr/>
-        </p:nvSpPr>
-        <p:spPr>
-          <a:xfrm>
-            <a:off x="7488936" y="2423160"/>
-            <a:ext cx="2103120" cy="1097280"/>
+              <a:t>CONSEQUÊNCIA</a:t>
+            </a:r>
+            <a:endParaRPr lang="en-US" sz="1300" dirty="0"/>
+          </a:p>
+        </p:txBody>
+      </p:sp>
+      <p:sp>
+        <p:nvSpPr>
+          <p:cNvPr id="13" name="Text 11"/>
+          <p:cNvSpPr/>
+          <p:nvPr/>
+        </p:nvSpPr>
+        <p:spPr>
+          <a:xfrm>
+            <a:off x="5230368" y="2971800"/>
+            <a:ext cx="1819656" cy="384048"/>
+          </a:xfrm>
+          <a:prstGeom prst="rect">
+            <a:avLst/>
+          </a:prstGeom>
+          <a:noFill/>
+          <a:ln/>
+        </p:spPr>
+        <p:txBody>
+          <a:bodyPr wrap="square" lIns="0" tIns="0" rIns="0" bIns="0" rtlCol="0" anchor="ctr"/>
+          <a:lstStyle/>
+          <a:p>
+            <a:pPr algn="ctr" indent="0" marL="0">
+              <a:buNone/>
+            </a:pPr>
+            <a:r>
+              <a:rPr lang="en-US" sz="1400" dirty="0">
+                <a:solidFill>
+                  <a:srgbClr val="FFFFFF"/>
+                </a:solidFill>
+              </a:rPr>
+              <a:t>o que está em risco</a:t>
+            </a:r>
+            <a:endParaRPr lang="en-US" sz="1400" dirty="0"/>
+          </a:p>
+        </p:txBody>
+      </p:sp>
+      <p:sp>
+        <p:nvSpPr>
+          <p:cNvPr id="14" name="Shape 12"/>
+          <p:cNvSpPr/>
+          <p:nvPr/>
+        </p:nvSpPr>
+        <p:spPr>
+          <a:xfrm>
+            <a:off x="7424928" y="2221992"/>
+            <a:ext cx="2148840" cy="1481328"/>
           </a:xfrm>
           <a:prstGeom prst="roundRect">
             <a:avLst/>
@@ -6787,14 +7800,14 @@
       </p:sp>
       <p:sp>
         <p:nvSpPr>
-          <p:cNvPr id="12" name="Text 10"/>
-          <p:cNvSpPr/>
-          <p:nvPr/>
-        </p:nvSpPr>
-        <p:spPr>
-          <a:xfrm>
-            <a:off x="7598664" y="2770632"/>
-            <a:ext cx="1883664" cy="320040"/>
+          <p:cNvPr id="15" name="Text 13"/>
+          <p:cNvSpPr/>
+          <p:nvPr/>
+        </p:nvSpPr>
+        <p:spPr>
+          <a:xfrm>
+            <a:off x="7534656" y="2496312"/>
+            <a:ext cx="1929384" cy="274320"/>
           </a:xfrm>
           <a:prstGeom prst="rect">
             <a:avLst/>
@@ -6810,27 +7823,63 @@
               <a:buNone/>
             </a:pPr>
             <a:r>
-              <a:rPr lang="en-US" sz="1500" b="1" dirty="0">
+              <a:rPr lang="en-US" sz="1300" b="1" dirty="0">
                 <a:solidFill>
                   <a:srgbClr val="FFFFFF"/>
                 </a:solidFill>
               </a:rPr>
-              <a:t>TRATAR</a:t>
-            </a:r>
-            <a:endParaRPr lang="en-US" sz="1500" dirty="0"/>
-          </a:p>
-        </p:txBody>
-      </p:sp>
-      <p:sp>
-        <p:nvSpPr>
-          <p:cNvPr id="13" name="Shape 11"/>
-          <p:cNvSpPr/>
-          <p:nvPr/>
-        </p:nvSpPr>
-        <p:spPr>
-          <a:xfrm>
-            <a:off x="9848088" y="2423160"/>
-            <a:ext cx="2103120" cy="1097280"/>
+              <a:t>CONTROLE</a:t>
+            </a:r>
+            <a:endParaRPr lang="en-US" sz="1300" dirty="0"/>
+          </a:p>
+        </p:txBody>
+      </p:sp>
+      <p:sp>
+        <p:nvSpPr>
+          <p:cNvPr id="16" name="Text 14"/>
+          <p:cNvSpPr/>
+          <p:nvPr/>
+        </p:nvSpPr>
+        <p:spPr>
+          <a:xfrm>
+            <a:off x="7589520" y="2971800"/>
+            <a:ext cx="1819656" cy="384048"/>
+          </a:xfrm>
+          <a:prstGeom prst="rect">
+            <a:avLst/>
+          </a:prstGeom>
+          <a:noFill/>
+          <a:ln/>
+        </p:spPr>
+        <p:txBody>
+          <a:bodyPr wrap="square" lIns="0" tIns="0" rIns="0" bIns="0" rtlCol="0" anchor="ctr"/>
+          <a:lstStyle/>
+          <a:p>
+            <a:pPr algn="ctr" indent="0" marL="0">
+              <a:buNone/>
+            </a:pPr>
+            <a:r>
+              <a:rPr lang="en-US" sz="1400" dirty="0">
+                <a:solidFill>
+                  <a:srgbClr val="FFFFFF"/>
+                </a:solidFill>
+              </a:rPr>
+              <a:t>onde intervir</a:t>
+            </a:r>
+            <a:endParaRPr lang="en-US" sz="1400" dirty="0"/>
+          </a:p>
+        </p:txBody>
+      </p:sp>
+      <p:sp>
+        <p:nvSpPr>
+          <p:cNvPr id="17" name="Shape 15"/>
+          <p:cNvSpPr/>
+          <p:nvPr/>
+        </p:nvSpPr>
+        <p:spPr>
+          <a:xfrm>
+            <a:off x="9784080" y="2221992"/>
+            <a:ext cx="2148840" cy="1481328"/>
           </a:xfrm>
           <a:prstGeom prst="roundRect">
             <a:avLst/>
@@ -6848,14 +7897,14 @@
       </p:sp>
       <p:sp>
         <p:nvSpPr>
-          <p:cNvPr id="14" name="Text 12"/>
-          <p:cNvSpPr/>
-          <p:nvPr/>
-        </p:nvSpPr>
-        <p:spPr>
-          <a:xfrm>
-            <a:off x="9957816" y="2770632"/>
-            <a:ext cx="1883664" cy="320040"/>
+          <p:cNvPr id="18" name="Text 16"/>
+          <p:cNvSpPr/>
+          <p:nvPr/>
+        </p:nvSpPr>
+        <p:spPr>
+          <a:xfrm>
+            <a:off x="9893808" y="2496312"/>
+            <a:ext cx="1929384" cy="274320"/>
           </a:xfrm>
           <a:prstGeom prst="rect">
             <a:avLst/>
@@ -6871,27 +7920,27 @@
               <a:buNone/>
             </a:pPr>
             <a:r>
-              <a:rPr lang="en-US" sz="1500" b="1" dirty="0">
+              <a:rPr lang="en-US" sz="1300" b="1" dirty="0">
                 <a:solidFill>
                   <a:srgbClr val="FFFFFF"/>
                 </a:solidFill>
               </a:rPr>
-              <a:t>VALIDAR</a:t>
-            </a:r>
-            <a:endParaRPr lang="en-US" sz="1500" dirty="0"/>
-          </a:p>
-        </p:txBody>
-      </p:sp>
-      <p:sp>
-        <p:nvSpPr>
-          <p:cNvPr id="15" name="Text 13"/>
-          <p:cNvSpPr/>
-          <p:nvPr/>
-        </p:nvSpPr>
-        <p:spPr>
-          <a:xfrm>
-            <a:off x="960120" y="4389120"/>
-            <a:ext cx="10241280" cy="822960"/>
+              <a:t>VALIDAÇÃO</a:t>
+            </a:r>
+            <a:endParaRPr lang="en-US" sz="1300" dirty="0"/>
+          </a:p>
+        </p:txBody>
+      </p:sp>
+      <p:sp>
+        <p:nvSpPr>
+          <p:cNvPr id="19" name="Text 17"/>
+          <p:cNvSpPr/>
+          <p:nvPr/>
+        </p:nvSpPr>
+        <p:spPr>
+          <a:xfrm>
+            <a:off x="9948672" y="2971800"/>
+            <a:ext cx="1819656" cy="384048"/>
           </a:xfrm>
           <a:prstGeom prst="rect">
             <a:avLst/>
@@ -6907,32 +7956,34 @@
               <a:buNone/>
             </a:pPr>
             <a:r>
-              <a:rPr lang="en-US" sz="2400" b="1" dirty="0">
-                <a:solidFill>
-                  <a:srgbClr val="12304A"/>
-                </a:solidFill>
-              </a:rPr>
-              <a:t>Que operação legítima seu controle pode interromper?</a:t>
-            </a:r>
-            <a:endParaRPr lang="en-US" sz="2400" dirty="0"/>
-          </a:p>
-        </p:txBody>
-      </p:sp>
-      <p:sp>
-        <p:nvSpPr>
-          <p:cNvPr id="16" name="Shape 14"/>
-          <p:cNvSpPr/>
-          <p:nvPr/>
-        </p:nvSpPr>
-        <p:spPr>
-          <a:xfrm>
-            <a:off x="548640" y="6473952"/>
-            <a:ext cx="11018520" cy="0"/>
-          </a:xfrm>
-          <a:prstGeom prst="line">
-            <a:avLst/>
-          </a:prstGeom>
-          <a:noFill/>
+              <a:rPr lang="en-US" sz="1400" dirty="0">
+                <a:solidFill>
+                  <a:srgbClr val="FFFFFF"/>
+                </a:solidFill>
+              </a:rPr>
+              <a:t>como provar</a:t>
+            </a:r>
+            <a:endParaRPr lang="en-US" sz="1400" dirty="0"/>
+          </a:p>
+        </p:txBody>
+      </p:sp>
+      <p:sp>
+        <p:nvSpPr>
+          <p:cNvPr id="20" name="Shape 18"/>
+          <p:cNvSpPr/>
+          <p:nvPr/>
+        </p:nvSpPr>
+        <p:spPr>
+          <a:xfrm>
+            <a:off x="932688" y="4315968"/>
+            <a:ext cx="10287000" cy="1024128"/>
+          </a:xfrm>
+          <a:prstGeom prst="roundRect">
+            <a:avLst/>
+          </a:prstGeom>
+          <a:solidFill>
+            <a:srgbClr val="FFFFFF"/>
+          </a:solidFill>
           <a:ln w="12700">
             <a:solidFill>
               <a:srgbClr val="C9D4DF"/>
@@ -6943,7 +7994,66 @@
       </p:sp>
       <p:sp>
         <p:nvSpPr>
-          <p:cNvPr id="17" name="Text 15"/>
+          <p:cNvPr id="21" name="Text 19"/>
+          <p:cNvSpPr/>
+          <p:nvPr/>
+        </p:nvSpPr>
+        <p:spPr>
+          <a:xfrm>
+            <a:off x="1234440" y="4590288"/>
+            <a:ext cx="9692640" cy="457200"/>
+          </a:xfrm>
+          <a:prstGeom prst="rect">
+            <a:avLst/>
+          </a:prstGeom>
+          <a:noFill/>
+          <a:ln/>
+        </p:spPr>
+        <p:txBody>
+          <a:bodyPr wrap="square" lIns="0" tIns="0" rIns="0" bIns="0" rtlCol="0" anchor="ctr"/>
+          <a:lstStyle/>
+          <a:p>
+            <a:pPr algn="ctr" indent="0" marL="0">
+              <a:buNone/>
+            </a:pPr>
+            <a:r>
+              <a:rPr lang="en-US" sz="1900" b="1" dirty="0">
+                <a:solidFill>
+                  <a:srgbClr val="12304A"/>
+                </a:solidFill>
+              </a:rPr>
+              <a:t>Complete: “Interrompemos o caminho em ___ com ___; a evidência de eficácia será ___ e o risco residual é ___.”</a:t>
+            </a:r>
+            <a:endParaRPr lang="en-US" sz="1900" dirty="0"/>
+          </a:p>
+        </p:txBody>
+      </p:sp>
+      <p:sp>
+        <p:nvSpPr>
+          <p:cNvPr id="22" name="Shape 20"/>
+          <p:cNvSpPr/>
+          <p:nvPr/>
+        </p:nvSpPr>
+        <p:spPr>
+          <a:xfrm>
+            <a:off x="548640" y="6473952"/>
+            <a:ext cx="11018520" cy="0"/>
+          </a:xfrm>
+          <a:prstGeom prst="line">
+            <a:avLst/>
+          </a:prstGeom>
+          <a:noFill/>
+          <a:ln w="12700">
+            <a:solidFill>
+              <a:srgbClr val="C9D4DF"/>
+            </a:solidFill>
+            <a:prstDash val="solid"/>
+          </a:ln>
+        </p:spPr>
+      </p:sp>
+      <p:sp>
+        <p:nvSpPr>
+          <p:cNvPr id="23" name="Text 21"/>
           <p:cNvSpPr/>
           <p:nvPr/>
         </p:nvSpPr>
@@ -6979,7 +8089,7 @@
       </p:sp>
       <p:sp>
         <p:nvSpPr>
-          <p:cNvPr id="18" name="Text 16"/>
+          <p:cNvPr id="24" name="Text 22"/>
           <p:cNvSpPr/>
           <p:nvPr/>
         </p:nvSpPr>
